--- a/presentation/식탐정_IA.pptx
+++ b/presentation/식탐정_IA.pptx
@@ -4,13 +4,13 @@
   <p:sldMasterIdLst>
     <p:sldMasterId id="2147483648" r:id="rId1"/>
   </p:sldMasterIdLst>
+  <p:notesMasterIdLst>
+    <p:notesMasterId r:id="rId4"/>
+  </p:notesMasterIdLst>
   <p:sldIdLst>
     <p:sldId id="256" r:id="rId2"/>
     <p:sldId id="257" r:id="rId3"/>
   </p:sldIdLst>
-  <p:notesMasterIdLst>
-    <p:notesMasterId r:id="rId4"/>
-  </p:notesMasterIdLst>
   <p:sldSz cx="12192000" cy="6858000"/>
   <p:notesSz cx="6858000" cy="12192000"/>
   <p:defaultTextStyle>
@@ -105,6 +105,11 @@
       </a:defRPr>
     </a:lvl9pPr>
   </p:defaultTextStyle>
+  <p:extLst>
+    <p:ext uri="{EFAFB233-063F-42B5-8137-9DF3F51BA10A}">
+      <p15:sldGuideLst xmlns:p15="http://schemas.microsoft.com/office/powerpoint/2012/main"/>
+    </p:ext>
+  </p:extLst>
 </p:presentation>
 </file>
 
@@ -130,240 +135,16 @@
           <a:chExt cx="0" cy="0"/>
         </a:xfrm>
       </p:grpSpPr>
-      <p:sp>
-        <p:nvSpPr>
-          <p:cNvPr id="2" name="Header Placeholder 1"/>
-          <p:cNvSpPr>
-            <a:spLocks noGrp="1"/>
-          </p:cNvSpPr>
-          <p:nvPr>
-            <p:ph type="hdr" sz="quarter"/>
-          </p:nvPr>
-        </p:nvSpPr>
-        <p:spPr>
-          <a:xfrm>
-            <a:off x="0" y="0"/>
-            <a:ext cx="2971800" cy="458788"/>
-          </a:xfrm>
-          <a:prstGeom prst="rect">
-            <a:avLst/>
-          </a:prstGeom>
-        </p:spPr>
-        <p:txBody>
-          <a:bodyPr vert="horz" lIns="91440" tIns="45720" rIns="91440" bIns="45720" rtlCol="0"/>
-          <a:lstStyle>
-            <a:lvl1pPr algn="l">
-              <a:defRPr sz="1200"/>
-            </a:lvl1pPr>
-          </a:lstStyle>
-          <a:p>
-            <a:endParaRPr lang="en-US"/>
-          </a:p>
-        </p:txBody>
-      </p:sp>
-      <p:sp>
-        <p:nvSpPr>
-          <p:cNvPr id="3" name="Date Placeholder 2"/>
-          <p:cNvSpPr>
-            <a:spLocks noGrp="1"/>
-          </p:cNvSpPr>
-          <p:nvPr>
-            <p:ph type="dt" idx="1"/>
-          </p:nvPr>
-        </p:nvSpPr>
-        <p:spPr>
-          <a:xfrm>
-            <a:off x="3884613" y="0"/>
-            <a:ext cx="2971800" cy="458788"/>
-          </a:xfrm>
-          <a:prstGeom prst="rect">
-            <a:avLst/>
-          </a:prstGeom>
-        </p:spPr>
-        <p:txBody>
-          <a:bodyPr vert="horz" lIns="91440" tIns="45720" rIns="91440" bIns="45720" rtlCol="0"/>
-          <a:lstStyle>
-            <a:lvl1pPr algn="r">
-              <a:defRPr sz="1200"/>
-            </a:lvl1pPr>
-          </a:lstStyle>
-          <a:p>
-            <a:fld id="{5282F153-3F37-0F45-9E97-73ACFA13230C}" type="datetimeFigureOut">
-              <a:rPr lang="en-US"/>
-              <a:t>7/23/19</a:t>
-            </a:fld>
-            <a:endParaRPr lang="en-US"/>
-          </a:p>
-        </p:txBody>
-      </p:sp>
-      <p:sp>
-        <p:nvSpPr>
-          <p:cNvPr id="4" name="Slide Image Placeholder 3"/>
-          <p:cNvSpPr>
-            <a:spLocks noGrp="1" noRot="1" noChangeAspect="1"/>
-          </p:cNvSpPr>
-          <p:nvPr>
-            <p:ph type="sldImg" idx="2"/>
-          </p:nvPr>
-        </p:nvSpPr>
-        <p:spPr>
-          <a:xfrm>
-            <a:off x="685800" y="1143000"/>
-            <a:ext cx="5486400" cy="3086100"/>
-          </a:xfrm>
-          <a:prstGeom prst="rect">
-            <a:avLst/>
-          </a:prstGeom>
-          <a:noFill/>
-          <a:ln w="12700">
-            <a:solidFill>
-              <a:prstClr val="black"/>
-            </a:solidFill>
-          </a:ln>
-        </p:spPr>
-        <p:txBody>
-          <a:bodyPr vert="horz" lIns="91440" tIns="45720" rIns="91440" bIns="45720" rtlCol="0" anchor="ctr"/>
-          <a:lstStyle/>
-          <a:p>
-            <a:endParaRPr lang="en-US"/>
-          </a:p>
-        </p:txBody>
-      </p:sp>
-      <p:sp>
-        <p:nvSpPr>
-          <p:cNvPr id="5" name="Notes Placeholder 4"/>
-          <p:cNvSpPr>
-            <a:spLocks noGrp="1"/>
-          </p:cNvSpPr>
-          <p:nvPr>
-            <p:ph type="body" sz="quarter" idx="3"/>
-          </p:nvPr>
-        </p:nvSpPr>
-        <p:spPr>
-          <a:xfrm>
-            <a:off x="685800" y="4400550"/>
-            <a:ext cx="5486400" cy="3600450"/>
-          </a:xfrm>
-          <a:prstGeom prst="rect">
-            <a:avLst/>
-          </a:prstGeom>
-        </p:spPr>
-        <p:txBody>
-          <a:bodyPr vert="horz" lIns="91440" tIns="45720" rIns="91440" bIns="45720" rtlCol="0"/>
-          <a:lstStyle/>
-          <a:p>
-            <a:pPr lvl="0"/>
-            <a:r>
-              <a:rPr lang="en-US"/>
-              <a:t>Click to edit Master text styles</a:t>
-            </a:r>
-          </a:p>
-          <a:p>
-            <a:pPr lvl="1"/>
-            <a:r>
-              <a:rPr lang="en-US"/>
-              <a:t>Second level</a:t>
-            </a:r>
-          </a:p>
-          <a:p>
-            <a:pPr lvl="2"/>
-            <a:r>
-              <a:rPr lang="en-US"/>
-              <a:t>Third level</a:t>
-            </a:r>
-          </a:p>
-          <a:p>
-            <a:pPr lvl="3"/>
-            <a:r>
-              <a:rPr lang="en-US"/>
-              <a:t>Fourth level</a:t>
-            </a:r>
-          </a:p>
-          <a:p>
-            <a:pPr lvl="4"/>
-            <a:r>
-              <a:rPr lang="en-US"/>
-              <a:t>Fifth level</a:t>
-            </a:r>
-          </a:p>
-        </p:txBody>
-      </p:sp>
-      <p:sp>
-        <p:nvSpPr>
-          <p:cNvPr id="6" name="Footer Placeholder 5"/>
-          <p:cNvSpPr>
-            <a:spLocks noGrp="1"/>
-          </p:cNvSpPr>
-          <p:nvPr>
-            <p:ph type="ftr" sz="quarter" idx="4"/>
-          </p:nvPr>
-        </p:nvSpPr>
-        <p:spPr>
-          <a:xfrm>
-            <a:off x="0" y="8685213"/>
-            <a:ext cx="2971800" cy="458787"/>
-          </a:xfrm>
-          <a:prstGeom prst="rect">
-            <a:avLst/>
-          </a:prstGeom>
-        </p:spPr>
-        <p:txBody>
-          <a:bodyPr vert="horz" lIns="91440" tIns="45720" rIns="91440" bIns="45720" rtlCol="0" anchor="b"/>
-          <a:lstStyle>
-            <a:lvl1pPr algn="l">
-              <a:defRPr sz="1200"/>
-            </a:lvl1pPr>
-          </a:lstStyle>
-          <a:p>
-            <a:endParaRPr lang="en-US"/>
-          </a:p>
-        </p:txBody>
-      </p:sp>
-      <p:sp>
-        <p:nvSpPr>
-          <p:cNvPr id="7" name="Slide Number Placeholder 6"/>
-          <p:cNvSpPr>
-            <a:spLocks noGrp="1"/>
-          </p:cNvSpPr>
-          <p:nvPr>
-            <p:ph type="sldNum" sz="quarter" idx="5"/>
-          </p:nvPr>
-        </p:nvSpPr>
-        <p:spPr>
-          <a:xfrm>
-            <a:off x="3884613" y="8685213"/>
-            <a:ext cx="2971800" cy="458787"/>
-          </a:xfrm>
-          <a:prstGeom prst="rect">
-            <a:avLst/>
-          </a:prstGeom>
-        </p:spPr>
-        <p:txBody>
-          <a:bodyPr vert="horz" lIns="91440" tIns="45720" rIns="91440" bIns="45720" rtlCol="0" anchor="b"/>
-          <a:lstStyle>
-            <a:lvl1pPr algn="r">
-              <a:defRPr sz="1200"/>
-            </a:lvl1pPr>
-          </a:lstStyle>
-          <a:p>
-            <a:fld id="{CE5E9CC1-C706-0F49-92D6-E571CC5EEA8F}" type="slidenum">
-              <a:rPr lang="en-US"/>
-              <a:t>‹#›</a:t>
-            </a:fld>
-            <a:endParaRPr lang="en-US"/>
-          </a:p>
-        </p:txBody>
-      </p:sp>
     </p:spTree>
     <p:extLst>
       <p:ext uri="{BB962C8B-B14F-4D97-AF65-F5344CB8AC3E}">
-        <p14:creationId xmlns:p14="http://schemas.microsoft.com/office/powerpoint/2010/main" val="1024086991"/>
+        <p14:creationId xmlns:p14="http://schemas.microsoft.com/office/powerpoint/2010/main" val="2286031268"/>
       </p:ext>
     </p:extLst>
   </p:cSld>
   <p:clrMap bg1="lt1" tx1="dk1" bg2="lt2" tx2="dk2" accent1="accent1" accent2="accent2" accent3="accent3" accent4="accent4" accent5="accent5" accent6="accent6" hlink="hlink" folHlink="folHlink"/>
   <p:notesStyle>
-    <a:lvl1pPr marL="0" algn="l" defTabSz="914400" rtl="0" eaLnBrk="1" latinLnBrk="0" hangingPunct="1">
+    <a:lvl1pPr marL="0" algn="l" defTabSz="914400" rtl="0" eaLnBrk="1" latinLnBrk="1" hangingPunct="1">
       <a:defRPr sz="1200" kern="1200">
         <a:solidFill>
           <a:schemeClr val="tx1"/>
@@ -373,7 +154,7 @@
         <a:cs typeface="+mn-cs"/>
       </a:defRPr>
     </a:lvl1pPr>
-    <a:lvl2pPr marL="457200" algn="l" defTabSz="914400" rtl="0" eaLnBrk="1" latinLnBrk="0" hangingPunct="1">
+    <a:lvl2pPr marL="457200" algn="l" defTabSz="914400" rtl="0" eaLnBrk="1" latinLnBrk="1" hangingPunct="1">
       <a:defRPr sz="1200" kern="1200">
         <a:solidFill>
           <a:schemeClr val="tx1"/>
@@ -383,7 +164,7 @@
         <a:cs typeface="+mn-cs"/>
       </a:defRPr>
     </a:lvl2pPr>
-    <a:lvl3pPr marL="914400" algn="l" defTabSz="914400" rtl="0" eaLnBrk="1" latinLnBrk="0" hangingPunct="1">
+    <a:lvl3pPr marL="914400" algn="l" defTabSz="914400" rtl="0" eaLnBrk="1" latinLnBrk="1" hangingPunct="1">
       <a:defRPr sz="1200" kern="1200">
         <a:solidFill>
           <a:schemeClr val="tx1"/>
@@ -393,7 +174,7 @@
         <a:cs typeface="+mn-cs"/>
       </a:defRPr>
     </a:lvl3pPr>
-    <a:lvl4pPr marL="1371600" algn="l" defTabSz="914400" rtl="0" eaLnBrk="1" latinLnBrk="0" hangingPunct="1">
+    <a:lvl4pPr marL="1371600" algn="l" defTabSz="914400" rtl="0" eaLnBrk="1" latinLnBrk="1" hangingPunct="1">
       <a:defRPr sz="1200" kern="1200">
         <a:solidFill>
           <a:schemeClr val="tx1"/>
@@ -403,7 +184,7 @@
         <a:cs typeface="+mn-cs"/>
       </a:defRPr>
     </a:lvl4pPr>
-    <a:lvl5pPr marL="1828800" algn="l" defTabSz="914400" rtl="0" eaLnBrk="1" latinLnBrk="0" hangingPunct="1">
+    <a:lvl5pPr marL="1828800" algn="l" defTabSz="914400" rtl="0" eaLnBrk="1" latinLnBrk="1" hangingPunct="1">
       <a:defRPr sz="1200" kern="1200">
         <a:solidFill>
           <a:schemeClr val="tx1"/>
@@ -413,7 +194,7 @@
         <a:cs typeface="+mn-cs"/>
       </a:defRPr>
     </a:lvl5pPr>
-    <a:lvl6pPr marL="2286000" algn="l" defTabSz="914400" rtl="0" eaLnBrk="1" latinLnBrk="0" hangingPunct="1">
+    <a:lvl6pPr marL="2286000" algn="l" defTabSz="914400" rtl="0" eaLnBrk="1" latinLnBrk="1" hangingPunct="1">
       <a:defRPr sz="1200" kern="1200">
         <a:solidFill>
           <a:schemeClr val="tx1"/>
@@ -423,7 +204,7 @@
         <a:cs typeface="+mn-cs"/>
       </a:defRPr>
     </a:lvl6pPr>
-    <a:lvl7pPr marL="2743200" algn="l" defTabSz="914400" rtl="0" eaLnBrk="1" latinLnBrk="0" hangingPunct="1">
+    <a:lvl7pPr marL="2743200" algn="l" defTabSz="914400" rtl="0" eaLnBrk="1" latinLnBrk="1" hangingPunct="1">
       <a:defRPr sz="1200" kern="1200">
         <a:solidFill>
           <a:schemeClr val="tx1"/>
@@ -433,7 +214,7 @@
         <a:cs typeface="+mn-cs"/>
       </a:defRPr>
     </a:lvl7pPr>
-    <a:lvl8pPr marL="3200400" algn="l" defTabSz="914400" rtl="0" eaLnBrk="1" latinLnBrk="0" hangingPunct="1">
+    <a:lvl8pPr marL="3200400" algn="l" defTabSz="914400" rtl="0" eaLnBrk="1" latinLnBrk="1" hangingPunct="1">
       <a:defRPr sz="1200" kern="1200">
         <a:solidFill>
           <a:schemeClr val="tx1"/>
@@ -443,7 +224,7 @@
         <a:cs typeface="+mn-cs"/>
       </a:defRPr>
     </a:lvl8pPr>
-    <a:lvl9pPr marL="3657600" algn="l" defTabSz="914400" rtl="0" eaLnBrk="1" latinLnBrk="0" hangingPunct="1">
+    <a:lvl9pPr marL="3657600" algn="l" defTabSz="914400" rtl="0" eaLnBrk="1" latinLnBrk="1" hangingPunct="1">
       <a:defRPr sz="1200" kern="1200">
         <a:solidFill>
           <a:schemeClr val="tx1"/>
@@ -501,10 +282,6 @@
           <a:bodyPr/>
           <a:lstStyle/>
           <a:p>
-            <a:r>
-              <a:rPr lang="en-US" dirty="0"/>
-              <a:t/>
-            </a:r>
             <a:endParaRPr lang="en-US" dirty="0"/>
           </a:p>
         </p:txBody>
@@ -589,10 +366,6 @@
           <a:bodyPr/>
           <a:lstStyle/>
           <a:p>
-            <a:r>
-              <a:rPr lang="en-US" dirty="0"/>
-              <a:t/>
-            </a:r>
             <a:endParaRPr lang="en-US" dirty="0"/>
           </a:p>
         </p:txBody>
@@ -666,6 +439,11 @@
 <file path=ppt/slideMasters/slideMaster1.xml><?xml version="1.0" encoding="utf-8"?>
 <p:sldMaster xmlns:a="http://schemas.openxmlformats.org/drawingml/2006/main" xmlns:r="http://schemas.openxmlformats.org/officeDocument/2006/relationships" xmlns:p="http://schemas.openxmlformats.org/presentationml/2006/main">
   <p:cSld>
+    <p:bg>
+      <p:bgRef idx="1001">
+        <a:schemeClr val="bg1"/>
+      </p:bgRef>
+    </p:bg>
     <p:spTree>
       <p:nvGrpSpPr>
         <p:cNvPr id="1" name=""/>
@@ -948,6 +726,7 @@
         <a:solidFill>
           <a:srgbClr val="0F172A"/>
         </a:solidFill>
+        <a:effectLst/>
       </p:bgPr>
     </p:bg>
     <p:spTree>
@@ -1049,7 +828,7 @@
           <a:bodyPr wrap="square" lIns="0" tIns="0" rIns="0" bIns="0" rtlCol="0" anchor="ctr"/>
           <a:lstStyle/>
           <a:p>
-            <a:pPr indent="0" marL="0">
+            <a:pPr marL="0" indent="0">
               <a:buNone/>
             </a:pPr>
             <a:r>
@@ -1088,7 +867,7 @@
           <a:bodyPr wrap="square" lIns="0" tIns="0" rIns="0" bIns="0" rtlCol="0" anchor="ctr"/>
           <a:lstStyle/>
           <a:p>
-            <a:pPr algn="r" indent="0" marL="0">
+            <a:pPr marL="0" indent="0" algn="r">
               <a:buNone/>
             </a:pPr>
             <a:r>
@@ -1102,9 +881,6 @@
               </a:rPr>
               <a:t>01</a:t>
             </a:r>
-            <a:pPr algn="r" indent="0" marL="0">
-              <a:buNone/>
-            </a:pPr>
             <a:r>
               <a:rPr lang="en-US" sz="900" dirty="0">
                 <a:solidFill>
@@ -1143,11 +919,11 @@
           <a:bodyPr wrap="square" lIns="0" tIns="0" rIns="0" bIns="0" rtlCol="0" anchor="t"/>
           <a:lstStyle/>
           <a:p>
-            <a:pPr indent="0" marL="0">
-              <a:buNone/>
-            </a:pPr>
-            <a:r>
-              <a:rPr lang="en-US" sz="900" b="1" spc="160" kern="0" dirty="0">
+            <a:pPr marL="0" indent="0">
+              <a:buNone/>
+            </a:pPr>
+            <a:r>
+              <a:rPr lang="en-US" sz="900" b="1" kern="0" spc="160" dirty="0">
                 <a:solidFill>
                   <a:srgbClr val="22C55E"/>
                 </a:solidFill>
@@ -1182,11 +958,11 @@
           <a:bodyPr wrap="square" lIns="0" tIns="0" rIns="0" bIns="0" rtlCol="0" anchor="t"/>
           <a:lstStyle/>
           <a:p>
-            <a:pPr indent="0" marL="0">
-              <a:buNone/>
-            </a:pPr>
-            <a:r>
-              <a:rPr lang="en-US" sz="2550" b="1" spc="-50" kern="0" dirty="0">
+            <a:pPr marL="0" indent="0">
+              <a:buNone/>
+            </a:pPr>
+            <a:r>
+              <a:rPr lang="en-US" sz="2550" b="1" kern="0" spc="-50" dirty="0">
                 <a:solidFill>
                   <a:srgbClr val="FFFFFF"/>
                 </a:solidFill>
@@ -1221,7 +997,7 @@
           <a:bodyPr wrap="square" lIns="0" tIns="0" rIns="0" bIns="0" rtlCol="0" anchor="t"/>
           <a:lstStyle/>
           <a:p>
-            <a:pPr indent="0" marL="0">
+            <a:pPr marL="0" indent="0">
               <a:buNone/>
             </a:pPr>
             <a:r>
@@ -1293,11 +1069,11 @@
           <a:bodyPr wrap="square" lIns="0" tIns="0" rIns="0" bIns="0" rtlCol="0" anchor="t"/>
           <a:lstStyle/>
           <a:p>
-            <a:pPr algn="ctr" indent="0" marL="0">
-              <a:buNone/>
-            </a:pPr>
-            <a:r>
-              <a:rPr lang="en-US" sz="788" b="1" spc="180" kern="0" dirty="0">
+            <a:pPr marL="0" indent="0" algn="ctr">
+              <a:buNone/>
+            </a:pPr>
+            <a:r>
+              <a:rPr lang="en-US" sz="788" b="1" kern="0" spc="180" dirty="0">
                 <a:solidFill>
                   <a:srgbClr val="22C55E"/>
                 </a:solidFill>
@@ -1332,7 +1108,7 @@
           <a:bodyPr wrap="square" lIns="0" tIns="0" rIns="0" bIns="0" rtlCol="0" anchor="t"/>
           <a:lstStyle/>
           <a:p>
-            <a:pPr algn="ctr" indent="0" marL="0">
+            <a:pPr marL="0" indent="0" algn="ctr">
               <a:buNone/>
             </a:pPr>
             <a:r>
@@ -1371,7 +1147,7 @@
           <a:bodyPr wrap="square" lIns="0" tIns="0" rIns="0" bIns="0" rtlCol="0" anchor="t"/>
           <a:lstStyle/>
           <a:p>
-            <a:pPr algn="ctr" indent="0" marL="0">
+            <a:pPr marL="0" indent="0" algn="ctr">
               <a:buNone/>
             </a:pPr>
             <a:r>
@@ -1412,7 +1188,7 @@
           </a:solidFill>
           <a:ln/>
           <a:effectLst>
-            <a:outerShdw sx="100000" sy="100000" kx="0" ky="0" algn="bl" rotWithShape="0" blurRad="101600" dist="25400" dir="5400000">
+            <a:outerShdw blurRad="101600" dist="25400" dir="5400000" algn="bl" rotWithShape="0">
               <a:srgbClr val="000000">
                 <a:alpha val="20000"/>
               </a:srgbClr>
@@ -1441,11 +1217,11 @@
           <a:bodyPr wrap="square" lIns="0" tIns="0" rIns="0" bIns="0" rtlCol="0" anchor="t"/>
           <a:lstStyle/>
           <a:p>
-            <a:pPr indent="0" marL="0">
-              <a:buNone/>
-            </a:pPr>
-            <a:r>
-              <a:rPr lang="en-US" sz="975" b="1" spc="-20" kern="0" dirty="0">
+            <a:pPr marL="0" indent="0">
+              <a:buNone/>
+            </a:pPr>
+            <a:r>
+              <a:rPr lang="en-US" sz="975" b="1" kern="0" spc="-20" dirty="0">
                 <a:solidFill>
                   <a:srgbClr val="0F172A"/>
                 </a:solidFill>
@@ -1502,11 +1278,11 @@
           <a:bodyPr wrap="square" lIns="0" tIns="0" rIns="0" bIns="0" rtlCol="0" anchor="ctr"/>
           <a:lstStyle/>
           <a:p>
-            <a:pPr algn="ctr" indent="0" marL="0">
-              <a:buNone/>
-            </a:pPr>
-            <a:r>
-              <a:rPr lang="en-US" sz="638" b="1" spc="50" kern="0" dirty="0">
+            <a:pPr marL="0" indent="0" algn="ctr">
+              <a:buNone/>
+            </a:pPr>
+            <a:r>
+              <a:rPr lang="en-US" sz="638" b="1" kern="0" spc="50" dirty="0">
                 <a:solidFill>
                   <a:srgbClr val="15803D"/>
                 </a:solidFill>
@@ -1541,7 +1317,7 @@
           <a:bodyPr wrap="square" lIns="0" tIns="0" rIns="0" bIns="0" rtlCol="0" anchor="t"/>
           <a:lstStyle/>
           <a:p>
-            <a:pPr indent="0" marL="0">
+            <a:pPr marL="0" indent="0">
               <a:buNone/>
             </a:pPr>
             <a:r>
@@ -1602,7 +1378,7 @@
           <a:bodyPr wrap="square" lIns="0" tIns="0" rIns="0" bIns="0" rtlCol="0" anchor="t"/>
           <a:lstStyle/>
           <a:p>
-            <a:pPr indent="0" marL="0">
+            <a:pPr marL="0" indent="0">
               <a:lnSpc>
                 <a:spcPct val="130000"/>
               </a:lnSpc>
@@ -1666,7 +1442,7 @@
           <a:bodyPr wrap="square" lIns="0" tIns="0" rIns="0" bIns="0" rtlCol="0" anchor="t"/>
           <a:lstStyle/>
           <a:p>
-            <a:pPr indent="0" marL="0">
+            <a:pPr marL="0" indent="0">
               <a:lnSpc>
                 <a:spcPct val="130000"/>
               </a:lnSpc>
@@ -1730,7 +1506,7 @@
           <a:bodyPr wrap="square" lIns="0" tIns="0" rIns="0" bIns="0" rtlCol="0" anchor="t"/>
           <a:lstStyle/>
           <a:p>
-            <a:pPr indent="0" marL="0">
+            <a:pPr marL="0" indent="0">
               <a:lnSpc>
                 <a:spcPct val="130000"/>
               </a:lnSpc>
@@ -1794,7 +1570,7 @@
           <a:bodyPr wrap="square" lIns="0" tIns="0" rIns="0" bIns="0" rtlCol="0" anchor="t"/>
           <a:lstStyle/>
           <a:p>
-            <a:pPr indent="0" marL="0">
+            <a:pPr marL="0" indent="0">
               <a:lnSpc>
                 <a:spcPct val="130000"/>
               </a:lnSpc>
@@ -1836,7 +1612,7 @@
           </a:solidFill>
           <a:ln/>
           <a:effectLst>
-            <a:outerShdw sx="100000" sy="100000" kx="0" ky="0" algn="bl" rotWithShape="0" blurRad="101600" dist="25400" dir="5400000">
+            <a:outerShdw blurRad="101600" dist="25400" dir="5400000" algn="bl" rotWithShape="0">
               <a:srgbClr val="000000">
                 <a:alpha val="20000"/>
               </a:srgbClr>
@@ -1865,11 +1641,11 @@
           <a:bodyPr wrap="square" lIns="0" tIns="0" rIns="0" bIns="0" rtlCol="0" anchor="t"/>
           <a:lstStyle/>
           <a:p>
-            <a:pPr indent="0" marL="0">
-              <a:buNone/>
-            </a:pPr>
-            <a:r>
-              <a:rPr lang="en-US" sz="975" b="1" spc="-20" kern="0" dirty="0">
+            <a:pPr marL="0" indent="0">
+              <a:buNone/>
+            </a:pPr>
+            <a:r>
+              <a:rPr lang="en-US" sz="975" b="1" kern="0" spc="-20" dirty="0">
                 <a:solidFill>
                   <a:srgbClr val="0F172A"/>
                 </a:solidFill>
@@ -1926,11 +1702,11 @@
           <a:bodyPr wrap="square" lIns="0" tIns="0" rIns="0" bIns="0" rtlCol="0" anchor="ctr"/>
           <a:lstStyle/>
           <a:p>
-            <a:pPr algn="ctr" indent="0" marL="0">
-              <a:buNone/>
-            </a:pPr>
-            <a:r>
-              <a:rPr lang="en-US" sz="638" b="1" spc="50" kern="0" dirty="0">
+            <a:pPr marL="0" indent="0" algn="ctr">
+              <a:buNone/>
+            </a:pPr>
+            <a:r>
+              <a:rPr lang="en-US" sz="638" b="1" kern="0" spc="50" dirty="0">
                 <a:solidFill>
                   <a:srgbClr val="15803D"/>
                 </a:solidFill>
@@ -1965,7 +1741,7 @@
           <a:bodyPr wrap="square" lIns="0" tIns="0" rIns="0" bIns="0" rtlCol="0" anchor="t"/>
           <a:lstStyle/>
           <a:p>
-            <a:pPr indent="0" marL="0">
+            <a:pPr marL="0" indent="0">
               <a:buNone/>
             </a:pPr>
             <a:r>
@@ -2026,7 +1802,7 @@
           <a:bodyPr wrap="square" lIns="0" tIns="0" rIns="0" bIns="0" rtlCol="0" anchor="t"/>
           <a:lstStyle/>
           <a:p>
-            <a:pPr indent="0" marL="0">
+            <a:pPr marL="0" indent="0">
               <a:lnSpc>
                 <a:spcPct val="130000"/>
               </a:lnSpc>
@@ -2090,7 +1866,7 @@
           <a:bodyPr wrap="square" lIns="0" tIns="0" rIns="0" bIns="0" rtlCol="0" anchor="t"/>
           <a:lstStyle/>
           <a:p>
-            <a:pPr indent="0" marL="0">
+            <a:pPr marL="0" indent="0">
               <a:lnSpc>
                 <a:spcPct val="130000"/>
               </a:lnSpc>
@@ -2154,7 +1930,7 @@
           <a:bodyPr wrap="square" lIns="0" tIns="0" rIns="0" bIns="0" rtlCol="0" anchor="t"/>
           <a:lstStyle/>
           <a:p>
-            <a:pPr indent="0" marL="0">
+            <a:pPr marL="0" indent="0">
               <a:lnSpc>
                 <a:spcPct val="130000"/>
               </a:lnSpc>
@@ -2227,11 +2003,11 @@
           <a:bodyPr wrap="square" lIns="0" tIns="0" rIns="0" bIns="0" rtlCol="0" anchor="t"/>
           <a:lstStyle/>
           <a:p>
-            <a:pPr algn="ctr" indent="0" marL="0">
-              <a:buNone/>
-            </a:pPr>
-            <a:r>
-              <a:rPr lang="en-US" sz="788" b="1" spc="180" kern="0" dirty="0">
+            <a:pPr marL="0" indent="0" algn="ctr">
+              <a:buNone/>
+            </a:pPr>
+            <a:r>
+              <a:rPr lang="en-US" sz="788" b="1" kern="0" spc="180" dirty="0">
                 <a:solidFill>
                   <a:srgbClr val="22C55E"/>
                 </a:solidFill>
@@ -2266,7 +2042,7 @@
           <a:bodyPr wrap="square" lIns="0" tIns="0" rIns="0" bIns="0" rtlCol="0" anchor="t"/>
           <a:lstStyle/>
           <a:p>
-            <a:pPr algn="ctr" indent="0" marL="0">
+            <a:pPr marL="0" indent="0" algn="ctr">
               <a:buNone/>
             </a:pPr>
             <a:r>
@@ -2305,7 +2081,7 @@
           <a:bodyPr wrap="square" lIns="0" tIns="0" rIns="0" bIns="0" rtlCol="0" anchor="t"/>
           <a:lstStyle/>
           <a:p>
-            <a:pPr algn="ctr" indent="0" marL="0">
+            <a:pPr marL="0" indent="0" algn="ctr">
               <a:buNone/>
             </a:pPr>
             <a:r>
@@ -2346,7 +2122,7 @@
           </a:solidFill>
           <a:ln/>
           <a:effectLst>
-            <a:outerShdw sx="100000" sy="100000" kx="0" ky="0" algn="bl" rotWithShape="0" blurRad="101600" dist="25400" dir="5400000">
+            <a:outerShdw blurRad="101600" dist="25400" dir="5400000" algn="bl" rotWithShape="0">
               <a:srgbClr val="000000">
                 <a:alpha val="20000"/>
               </a:srgbClr>
@@ -2375,11 +2151,11 @@
           <a:bodyPr wrap="square" lIns="0" tIns="0" rIns="0" bIns="0" rtlCol="0" anchor="t"/>
           <a:lstStyle/>
           <a:p>
-            <a:pPr indent="0" marL="0">
-              <a:buNone/>
-            </a:pPr>
-            <a:r>
-              <a:rPr lang="en-US" sz="975" b="1" spc="-20" kern="0" dirty="0">
+            <a:pPr marL="0" indent="0">
+              <a:buNone/>
+            </a:pPr>
+            <a:r>
+              <a:rPr lang="en-US" sz="975" b="1" kern="0" spc="-20" dirty="0">
                 <a:solidFill>
                   <a:srgbClr val="0F172A"/>
                 </a:solidFill>
@@ -2436,11 +2212,11 @@
           <a:bodyPr wrap="square" lIns="0" tIns="0" rIns="0" bIns="0" rtlCol="0" anchor="ctr"/>
           <a:lstStyle/>
           <a:p>
-            <a:pPr algn="ctr" indent="0" marL="0">
-              <a:buNone/>
-            </a:pPr>
-            <a:r>
-              <a:rPr lang="en-US" sz="638" b="1" spc="50" kern="0" dirty="0">
+            <a:pPr marL="0" indent="0" algn="ctr">
+              <a:buNone/>
+            </a:pPr>
+            <a:r>
+              <a:rPr lang="en-US" sz="638" b="1" kern="0" spc="50" dirty="0">
                 <a:solidFill>
                   <a:srgbClr val="15803D"/>
                 </a:solidFill>
@@ -2475,7 +2251,7 @@
           <a:bodyPr wrap="square" lIns="0" tIns="0" rIns="0" bIns="0" rtlCol="0" anchor="t"/>
           <a:lstStyle/>
           <a:p>
-            <a:pPr indent="0" marL="0">
+            <a:pPr marL="0" indent="0">
               <a:buNone/>
             </a:pPr>
             <a:r>
@@ -2536,7 +2312,7 @@
           <a:bodyPr wrap="square" lIns="0" tIns="0" rIns="0" bIns="0" rtlCol="0" anchor="t"/>
           <a:lstStyle/>
           <a:p>
-            <a:pPr indent="0" marL="0">
+            <a:pPr marL="0" indent="0">
               <a:lnSpc>
                 <a:spcPct val="130000"/>
               </a:lnSpc>
@@ -2600,7 +2376,7 @@
           <a:bodyPr wrap="square" lIns="0" tIns="0" rIns="0" bIns="0" rtlCol="0" anchor="t"/>
           <a:lstStyle/>
           <a:p>
-            <a:pPr indent="0" marL="0">
+            <a:pPr marL="0" indent="0">
               <a:lnSpc>
                 <a:spcPct val="130000"/>
               </a:lnSpc>
@@ -2664,7 +2440,7 @@
           <a:bodyPr wrap="square" lIns="0" tIns="0" rIns="0" bIns="0" rtlCol="0" anchor="t"/>
           <a:lstStyle/>
           <a:p>
-            <a:pPr indent="0" marL="0">
+            <a:pPr marL="0" indent="0">
               <a:lnSpc>
                 <a:spcPct val="130000"/>
               </a:lnSpc>
@@ -2706,7 +2482,7 @@
           </a:solidFill>
           <a:ln/>
           <a:effectLst>
-            <a:outerShdw sx="100000" sy="100000" kx="0" ky="0" algn="bl" rotWithShape="0" blurRad="101600" dist="25400" dir="5400000">
+            <a:outerShdw blurRad="101600" dist="25400" dir="5400000" algn="bl" rotWithShape="0">
               <a:srgbClr val="000000">
                 <a:alpha val="20000"/>
               </a:srgbClr>
@@ -2735,11 +2511,11 @@
           <a:bodyPr wrap="square" lIns="0" tIns="0" rIns="0" bIns="0" rtlCol="0" anchor="t"/>
           <a:lstStyle/>
           <a:p>
-            <a:pPr indent="0" marL="0">
-              <a:buNone/>
-            </a:pPr>
-            <a:r>
-              <a:rPr lang="en-US" sz="975" b="1" spc="-20" kern="0" dirty="0">
+            <a:pPr marL="0" indent="0">
+              <a:buNone/>
+            </a:pPr>
+            <a:r>
+              <a:rPr lang="en-US" sz="975" b="1" kern="0" spc="-20" dirty="0">
                 <a:solidFill>
                   <a:srgbClr val="0F172A"/>
                 </a:solidFill>
@@ -2796,11 +2572,11 @@
           <a:bodyPr wrap="square" lIns="0" tIns="0" rIns="0" bIns="0" rtlCol="0" anchor="ctr"/>
           <a:lstStyle/>
           <a:p>
-            <a:pPr algn="ctr" indent="0" marL="0">
-              <a:buNone/>
-            </a:pPr>
-            <a:r>
-              <a:rPr lang="en-US" sz="638" b="1" spc="50" kern="0" dirty="0">
+            <a:pPr marL="0" indent="0" algn="ctr">
+              <a:buNone/>
+            </a:pPr>
+            <a:r>
+              <a:rPr lang="en-US" sz="638" b="1" kern="0" spc="50" dirty="0">
                 <a:solidFill>
                   <a:srgbClr val="15803D"/>
                 </a:solidFill>
@@ -2835,7 +2611,7 @@
           <a:bodyPr wrap="square" lIns="0" tIns="0" rIns="0" bIns="0" rtlCol="0" anchor="t"/>
           <a:lstStyle/>
           <a:p>
-            <a:pPr indent="0" marL="0">
+            <a:pPr marL="0" indent="0">
               <a:buNone/>
             </a:pPr>
             <a:r>
@@ -2896,7 +2672,7 @@
           <a:bodyPr wrap="square" lIns="0" tIns="0" rIns="0" bIns="0" rtlCol="0" anchor="t"/>
           <a:lstStyle/>
           <a:p>
-            <a:pPr indent="0" marL="0">
+            <a:pPr marL="0" indent="0">
               <a:lnSpc>
                 <a:spcPct val="130000"/>
               </a:lnSpc>
@@ -2960,7 +2736,7 @@
           <a:bodyPr wrap="square" lIns="0" tIns="0" rIns="0" bIns="0" rtlCol="0" anchor="t"/>
           <a:lstStyle/>
           <a:p>
-            <a:pPr indent="0" marL="0">
+            <a:pPr marL="0" indent="0">
               <a:lnSpc>
                 <a:spcPct val="130000"/>
               </a:lnSpc>
@@ -3024,7 +2800,7 @@
           <a:bodyPr wrap="square" lIns="0" tIns="0" rIns="0" bIns="0" rtlCol="0" anchor="t"/>
           <a:lstStyle/>
           <a:p>
-            <a:pPr indent="0" marL="0">
+            <a:pPr marL="0" indent="0">
               <a:lnSpc>
                 <a:spcPct val="130000"/>
               </a:lnSpc>
@@ -3088,7 +2864,7 @@
           <a:bodyPr wrap="square" lIns="0" tIns="0" rIns="0" bIns="0" rtlCol="0" anchor="t"/>
           <a:lstStyle/>
           <a:p>
-            <a:pPr indent="0" marL="0">
+            <a:pPr marL="0" indent="0">
               <a:lnSpc>
                 <a:spcPct val="130000"/>
               </a:lnSpc>
@@ -3152,7 +2928,7 @@
           <a:bodyPr wrap="square" lIns="0" tIns="0" rIns="0" bIns="0" rtlCol="0" anchor="t"/>
           <a:lstStyle/>
           <a:p>
-            <a:pPr indent="0" marL="0">
+            <a:pPr marL="0" indent="0">
               <a:lnSpc>
                 <a:spcPct val="130000"/>
               </a:lnSpc>
@@ -3225,11 +3001,11 @@
           <a:bodyPr wrap="square" lIns="0" tIns="0" rIns="0" bIns="0" rtlCol="0" anchor="t"/>
           <a:lstStyle/>
           <a:p>
-            <a:pPr algn="ctr" indent="0" marL="0">
-              <a:buNone/>
-            </a:pPr>
-            <a:r>
-              <a:rPr lang="en-US" sz="788" b="1" spc="180" kern="0" dirty="0">
+            <a:pPr marL="0" indent="0" algn="ctr">
+              <a:buNone/>
+            </a:pPr>
+            <a:r>
+              <a:rPr lang="en-US" sz="788" b="1" kern="0" spc="180" dirty="0">
                 <a:solidFill>
                   <a:srgbClr val="22C55E"/>
                 </a:solidFill>
@@ -3264,7 +3040,7 @@
           <a:bodyPr wrap="square" lIns="0" tIns="0" rIns="0" bIns="0" rtlCol="0" anchor="t"/>
           <a:lstStyle/>
           <a:p>
-            <a:pPr algn="ctr" indent="0" marL="0">
+            <a:pPr marL="0" indent="0" algn="ctr">
               <a:buNone/>
             </a:pPr>
             <a:r>
@@ -3303,7 +3079,7 @@
           <a:bodyPr wrap="square" lIns="0" tIns="0" rIns="0" bIns="0" rtlCol="0" anchor="t"/>
           <a:lstStyle/>
           <a:p>
-            <a:pPr algn="ctr" indent="0" marL="0">
+            <a:pPr marL="0" indent="0" algn="ctr">
               <a:buNone/>
             </a:pPr>
             <a:r>
@@ -3344,7 +3120,7 @@
           </a:solidFill>
           <a:ln/>
           <a:effectLst>
-            <a:outerShdw sx="100000" sy="100000" kx="0" ky="0" algn="bl" rotWithShape="0" blurRad="101600" dist="25400" dir="5400000">
+            <a:outerShdw blurRad="101600" dist="25400" dir="5400000" algn="bl" rotWithShape="0">
               <a:srgbClr val="000000">
                 <a:alpha val="20000"/>
               </a:srgbClr>
@@ -3373,11 +3149,11 @@
           <a:bodyPr wrap="square" lIns="0" tIns="0" rIns="0" bIns="0" rtlCol="0" anchor="t"/>
           <a:lstStyle/>
           <a:p>
-            <a:pPr indent="0" marL="0">
-              <a:buNone/>
-            </a:pPr>
-            <a:r>
-              <a:rPr lang="en-US" sz="975" b="1" spc="-20" kern="0" dirty="0">
+            <a:pPr marL="0" indent="0">
+              <a:buNone/>
+            </a:pPr>
+            <a:r>
+              <a:rPr lang="en-US" sz="975" b="1" kern="0" spc="-20" dirty="0">
                 <a:solidFill>
                   <a:srgbClr val="0F172A"/>
                 </a:solidFill>
@@ -3434,11 +3210,11 @@
           <a:bodyPr wrap="square" lIns="0" tIns="0" rIns="0" bIns="0" rtlCol="0" anchor="ctr"/>
           <a:lstStyle/>
           <a:p>
-            <a:pPr algn="ctr" indent="0" marL="0">
-              <a:buNone/>
-            </a:pPr>
-            <a:r>
-              <a:rPr lang="en-US" sz="638" b="1" spc="50" kern="0" dirty="0">
+            <a:pPr marL="0" indent="0" algn="ctr">
+              <a:buNone/>
+            </a:pPr>
+            <a:r>
+              <a:rPr lang="en-US" sz="638" b="1" kern="0" spc="50" dirty="0">
                 <a:solidFill>
                   <a:srgbClr val="1E3A8A"/>
                 </a:solidFill>
@@ -3473,7 +3249,7 @@
           <a:bodyPr wrap="square" lIns="0" tIns="0" rIns="0" bIns="0" rtlCol="0" anchor="t"/>
           <a:lstStyle/>
           <a:p>
-            <a:pPr indent="0" marL="0">
+            <a:pPr marL="0" indent="0">
               <a:buNone/>
             </a:pPr>
             <a:r>
@@ -3534,7 +3310,7 @@
           <a:bodyPr wrap="square" lIns="0" tIns="0" rIns="0" bIns="0" rtlCol="0" anchor="t"/>
           <a:lstStyle/>
           <a:p>
-            <a:pPr indent="0" marL="0">
+            <a:pPr marL="0" indent="0">
               <a:lnSpc>
                 <a:spcPct val="130000"/>
               </a:lnSpc>
@@ -3598,7 +3374,7 @@
           <a:bodyPr wrap="square" lIns="0" tIns="0" rIns="0" bIns="0" rtlCol="0" anchor="t"/>
           <a:lstStyle/>
           <a:p>
-            <a:pPr indent="0" marL="0">
+            <a:pPr marL="0" indent="0">
               <a:lnSpc>
                 <a:spcPct val="130000"/>
               </a:lnSpc>
@@ -3662,7 +3438,7 @@
           <a:bodyPr wrap="square" lIns="0" tIns="0" rIns="0" bIns="0" rtlCol="0" anchor="t"/>
           <a:lstStyle/>
           <a:p>
-            <a:pPr indent="0" marL="0">
+            <a:pPr marL="0" indent="0">
               <a:lnSpc>
                 <a:spcPct val="130000"/>
               </a:lnSpc>
@@ -3704,7 +3480,7 @@
           </a:solidFill>
           <a:ln/>
           <a:effectLst>
-            <a:outerShdw sx="100000" sy="100000" kx="0" ky="0" algn="bl" rotWithShape="0" blurRad="101600" dist="25400" dir="5400000">
+            <a:outerShdw blurRad="101600" dist="25400" dir="5400000" algn="bl" rotWithShape="0">
               <a:srgbClr val="000000">
                 <a:alpha val="20000"/>
               </a:srgbClr>
@@ -3733,11 +3509,11 @@
           <a:bodyPr wrap="square" lIns="0" tIns="0" rIns="0" bIns="0" rtlCol="0" anchor="t"/>
           <a:lstStyle/>
           <a:p>
-            <a:pPr indent="0" marL="0">
-              <a:buNone/>
-            </a:pPr>
-            <a:r>
-              <a:rPr lang="en-US" sz="975" b="1" spc="-20" kern="0" dirty="0">
+            <a:pPr marL="0" indent="0">
+              <a:buNone/>
+            </a:pPr>
+            <a:r>
+              <a:rPr lang="en-US" sz="975" b="1" kern="0" spc="-20" dirty="0">
                 <a:solidFill>
                   <a:srgbClr val="0F172A"/>
                 </a:solidFill>
@@ -3794,11 +3570,11 @@
           <a:bodyPr wrap="square" lIns="0" tIns="0" rIns="0" bIns="0" rtlCol="0" anchor="ctr"/>
           <a:lstStyle/>
           <a:p>
-            <a:pPr algn="ctr" indent="0" marL="0">
-              <a:buNone/>
-            </a:pPr>
-            <a:r>
-              <a:rPr lang="en-US" sz="638" b="1" spc="50" kern="0" dirty="0">
+            <a:pPr marL="0" indent="0" algn="ctr">
+              <a:buNone/>
+            </a:pPr>
+            <a:r>
+              <a:rPr lang="en-US" sz="638" b="1" kern="0" spc="50" dirty="0">
                 <a:solidFill>
                   <a:srgbClr val="1E3A8A"/>
                 </a:solidFill>
@@ -3833,7 +3609,7 @@
           <a:bodyPr wrap="square" lIns="0" tIns="0" rIns="0" bIns="0" rtlCol="0" anchor="t"/>
           <a:lstStyle/>
           <a:p>
-            <a:pPr indent="0" marL="0">
+            <a:pPr marL="0" indent="0">
               <a:buNone/>
             </a:pPr>
             <a:r>
@@ -3894,7 +3670,7 @@
           <a:bodyPr wrap="square" lIns="0" tIns="0" rIns="0" bIns="0" rtlCol="0" anchor="t"/>
           <a:lstStyle/>
           <a:p>
-            <a:pPr indent="0" marL="0">
+            <a:pPr marL="0" indent="0">
               <a:lnSpc>
                 <a:spcPct val="130000"/>
               </a:lnSpc>
@@ -3958,7 +3734,7 @@
           <a:bodyPr wrap="square" lIns="0" tIns="0" rIns="0" bIns="0" rtlCol="0" anchor="t"/>
           <a:lstStyle/>
           <a:p>
-            <a:pPr indent="0" marL="0">
+            <a:pPr marL="0" indent="0">
               <a:lnSpc>
                 <a:spcPct val="130000"/>
               </a:lnSpc>
@@ -4031,11 +3807,11 @@
           <a:bodyPr wrap="square" lIns="0" tIns="0" rIns="0" bIns="0" rtlCol="0" anchor="t"/>
           <a:lstStyle/>
           <a:p>
-            <a:pPr algn="ctr" indent="0" marL="0">
-              <a:buNone/>
-            </a:pPr>
-            <a:r>
-              <a:rPr lang="en-US" sz="788" b="1" spc="180" kern="0" dirty="0">
+            <a:pPr marL="0" indent="0" algn="ctr">
+              <a:buNone/>
+            </a:pPr>
+            <a:r>
+              <a:rPr lang="en-US" sz="788" b="1" kern="0" spc="180" dirty="0">
                 <a:solidFill>
                   <a:srgbClr val="22C55E"/>
                 </a:solidFill>
@@ -4070,7 +3846,7 @@
           <a:bodyPr wrap="square" lIns="0" tIns="0" rIns="0" bIns="0" rtlCol="0" anchor="t"/>
           <a:lstStyle/>
           <a:p>
-            <a:pPr algn="ctr" indent="0" marL="0">
+            <a:pPr marL="0" indent="0" algn="ctr">
               <a:buNone/>
             </a:pPr>
             <a:r>
@@ -4109,7 +3885,7 @@
           <a:bodyPr wrap="square" lIns="0" tIns="0" rIns="0" bIns="0" rtlCol="0" anchor="t"/>
           <a:lstStyle/>
           <a:p>
-            <a:pPr algn="ctr" indent="0" marL="0">
+            <a:pPr marL="0" indent="0" algn="ctr">
               <a:buNone/>
             </a:pPr>
             <a:r>
@@ -4150,7 +3926,7 @@
           </a:solidFill>
           <a:ln/>
           <a:effectLst>
-            <a:outerShdw sx="100000" sy="100000" kx="0" ky="0" algn="bl" rotWithShape="0" blurRad="101600" dist="25400" dir="5400000">
+            <a:outerShdw blurRad="101600" dist="25400" dir="5400000" algn="bl" rotWithShape="0">
               <a:srgbClr val="000000">
                 <a:alpha val="20000"/>
               </a:srgbClr>
@@ -4179,11 +3955,11 @@
           <a:bodyPr wrap="square" lIns="0" tIns="0" rIns="0" bIns="0" rtlCol="0" anchor="t"/>
           <a:lstStyle/>
           <a:p>
-            <a:pPr indent="0" marL="0">
-              <a:buNone/>
-            </a:pPr>
-            <a:r>
-              <a:rPr lang="en-US" sz="975" b="1" spc="-20" kern="0" dirty="0">
+            <a:pPr marL="0" indent="0">
+              <a:buNone/>
+            </a:pPr>
+            <a:r>
+              <a:rPr lang="en-US" sz="975" b="1" kern="0" spc="-20" dirty="0">
                 <a:solidFill>
                   <a:srgbClr val="0F172A"/>
                 </a:solidFill>
@@ -4240,11 +4016,11 @@
           <a:bodyPr wrap="square" lIns="0" tIns="0" rIns="0" bIns="0" rtlCol="0" anchor="ctr"/>
           <a:lstStyle/>
           <a:p>
-            <a:pPr algn="ctr" indent="0" marL="0">
-              <a:buNone/>
-            </a:pPr>
-            <a:r>
-              <a:rPr lang="en-US" sz="638" b="1" spc="50" kern="0" dirty="0">
+            <a:pPr marL="0" indent="0" algn="ctr">
+              <a:buNone/>
+            </a:pPr>
+            <a:r>
+              <a:rPr lang="en-US" sz="638" b="1" kern="0" spc="50" dirty="0">
                 <a:solidFill>
                   <a:srgbClr val="1E3A8A"/>
                 </a:solidFill>
@@ -4279,7 +4055,7 @@
           <a:bodyPr wrap="square" lIns="0" tIns="0" rIns="0" bIns="0" rtlCol="0" anchor="t"/>
           <a:lstStyle/>
           <a:p>
-            <a:pPr indent="0" marL="0">
+            <a:pPr marL="0" indent="0">
               <a:buNone/>
             </a:pPr>
             <a:r>
@@ -4340,7 +4116,7 @@
           <a:bodyPr wrap="square" lIns="0" tIns="0" rIns="0" bIns="0" rtlCol="0" anchor="t"/>
           <a:lstStyle/>
           <a:p>
-            <a:pPr indent="0" marL="0">
+            <a:pPr marL="0" indent="0">
               <a:lnSpc>
                 <a:spcPct val="130000"/>
               </a:lnSpc>
@@ -4404,7 +4180,7 @@
           <a:bodyPr wrap="square" lIns="0" tIns="0" rIns="0" bIns="0" rtlCol="0" anchor="t"/>
           <a:lstStyle/>
           <a:p>
-            <a:pPr indent="0" marL="0">
+            <a:pPr marL="0" indent="0">
               <a:lnSpc>
                 <a:spcPct val="130000"/>
               </a:lnSpc>
@@ -4468,7 +4244,7 @@
           <a:bodyPr wrap="square" lIns="0" tIns="0" rIns="0" bIns="0" rtlCol="0" anchor="t"/>
           <a:lstStyle/>
           <a:p>
-            <a:pPr indent="0" marL="0">
+            <a:pPr marL="0" indent="0">
               <a:lnSpc>
                 <a:spcPct val="130000"/>
               </a:lnSpc>
@@ -4510,7 +4286,7 @@
           </a:solidFill>
           <a:ln/>
           <a:effectLst>
-            <a:outerShdw sx="100000" sy="100000" kx="0" ky="0" algn="bl" rotWithShape="0" blurRad="101600" dist="25400" dir="5400000">
+            <a:outerShdw blurRad="101600" dist="25400" dir="5400000" algn="bl" rotWithShape="0">
               <a:srgbClr val="000000">
                 <a:alpha val="20000"/>
               </a:srgbClr>
@@ -4539,11 +4315,11 @@
           <a:bodyPr wrap="square" lIns="0" tIns="0" rIns="0" bIns="0" rtlCol="0" anchor="t"/>
           <a:lstStyle/>
           <a:p>
-            <a:pPr indent="0" marL="0">
-              <a:buNone/>
-            </a:pPr>
-            <a:r>
-              <a:rPr lang="en-US" sz="975" b="1" spc="-20" kern="0" dirty="0">
+            <a:pPr marL="0" indent="0">
+              <a:buNone/>
+            </a:pPr>
+            <a:r>
+              <a:rPr lang="en-US" sz="975" b="1" kern="0" spc="-20" dirty="0">
                 <a:solidFill>
                   <a:srgbClr val="0F172A"/>
                 </a:solidFill>
@@ -4600,11 +4376,11 @@
           <a:bodyPr wrap="square" lIns="0" tIns="0" rIns="0" bIns="0" rtlCol="0" anchor="ctr"/>
           <a:lstStyle/>
           <a:p>
-            <a:pPr algn="ctr" indent="0" marL="0">
-              <a:buNone/>
-            </a:pPr>
-            <a:r>
-              <a:rPr lang="en-US" sz="638" b="1" spc="50" kern="0" dirty="0">
+            <a:pPr marL="0" indent="0" algn="ctr">
+              <a:buNone/>
+            </a:pPr>
+            <a:r>
+              <a:rPr lang="en-US" sz="638" b="1" kern="0" spc="50" dirty="0">
                 <a:solidFill>
                   <a:srgbClr val="92400E"/>
                 </a:solidFill>
@@ -4639,7 +4415,7 @@
           <a:bodyPr wrap="square" lIns="0" tIns="0" rIns="0" bIns="0" rtlCol="0" anchor="t"/>
           <a:lstStyle/>
           <a:p>
-            <a:pPr indent="0" marL="0">
+            <a:pPr marL="0" indent="0">
               <a:buNone/>
             </a:pPr>
             <a:r>
@@ -4700,7 +4476,7 @@
           <a:bodyPr wrap="square" lIns="0" tIns="0" rIns="0" bIns="0" rtlCol="0" anchor="t"/>
           <a:lstStyle/>
           <a:p>
-            <a:pPr indent="0" marL="0">
+            <a:pPr marL="0" indent="0">
               <a:lnSpc>
                 <a:spcPct val="130000"/>
               </a:lnSpc>
@@ -4764,7 +4540,7 @@
           <a:bodyPr wrap="square" lIns="0" tIns="0" rIns="0" bIns="0" rtlCol="0" anchor="t"/>
           <a:lstStyle/>
           <a:p>
-            <a:pPr indent="0" marL="0">
+            <a:pPr marL="0" indent="0">
               <a:lnSpc>
                 <a:spcPct val="130000"/>
               </a:lnSpc>
@@ -4828,7 +4604,7 @@
           <a:bodyPr wrap="square" lIns="0" tIns="0" rIns="0" bIns="0" rtlCol="0" anchor="t"/>
           <a:lstStyle/>
           <a:p>
-            <a:pPr indent="0" marL="0">
+            <a:pPr marL="0" indent="0">
               <a:lnSpc>
                 <a:spcPct val="130000"/>
               </a:lnSpc>
@@ -4870,11 +4646,11 @@
           <a:bodyPr wrap="square" lIns="0" tIns="0" rIns="0" bIns="0" rtlCol="0" anchor="t"/>
           <a:lstStyle/>
           <a:p>
-            <a:pPr indent="0" marL="0">
-              <a:buNone/>
-            </a:pPr>
-            <a:r>
-              <a:rPr lang="en-US" sz="825" b="1" spc="140" kern="0" dirty="0">
+            <a:pPr marL="0" indent="0">
+              <a:buNone/>
+            </a:pPr>
+            <a:r>
+              <a:rPr lang="en-US" sz="825" b="1" kern="0" spc="140" dirty="0">
                 <a:solidFill>
                   <a:srgbClr val="FBBF24"/>
                 </a:solidFill>
@@ -4909,7 +4685,7 @@
           <a:bodyPr wrap="square" lIns="0" tIns="0" rIns="0" bIns="0" rtlCol="0" anchor="t"/>
           <a:lstStyle/>
           <a:p>
-            <a:pPr algn="ctr" indent="0" marL="0">
+            <a:pPr marL="0" indent="0" algn="ctr">
               <a:buNone/>
             </a:pPr>
             <a:r>
@@ -4925,9 +4701,6 @@
               </a:rPr>
               <a:t>홈·지도 </a:t>
             </a:r>
-            <a:pPr algn="ctr" indent="0" marL="0">
-              <a:buNone/>
-            </a:pPr>
             <a:r>
               <a:rPr lang="en-US" sz="825" b="1" dirty="0">
                 <a:solidFill>
@@ -4939,9 +4712,6 @@
               </a:rPr>
               <a:t>→ </a:t>
             </a:r>
-            <a:pPr algn="ctr" indent="0" marL="0">
-              <a:buNone/>
-            </a:pPr>
             <a:r>
               <a:rPr lang="en-US" sz="825" dirty="0">
                 <a:solidFill>
@@ -4955,9 +4725,6 @@
               </a:rPr>
               <a:t>상세 보고서 </a:t>
             </a:r>
-            <a:pPr algn="ctr" indent="0" marL="0">
-              <a:buNone/>
-            </a:pPr>
             <a:r>
               <a:rPr lang="en-US" sz="825" b="1" dirty="0">
                 <a:solidFill>
@@ -4969,9 +4736,6 @@
               </a:rPr>
               <a:t>→ </a:t>
             </a:r>
-            <a:pPr algn="ctr" indent="0" marL="0">
-              <a:buNone/>
-            </a:pPr>
             <a:r>
               <a:rPr lang="en-US" sz="825" dirty="0">
                 <a:solidFill>
@@ -4985,9 +4749,6 @@
               </a:rPr>
               <a:t>리뷰·좋아요 </a:t>
             </a:r>
-            <a:pPr algn="ctr" indent="0" marL="0">
-              <a:buNone/>
-            </a:pPr>
             <a:r>
               <a:rPr lang="en-US" sz="825" b="1" dirty="0">
                 <a:solidFill>
@@ -4999,9 +4760,6 @@
               </a:rPr>
               <a:t>→ </a:t>
             </a:r>
-            <a:pPr algn="ctr" indent="0" marL="0">
-              <a:buNone/>
-            </a:pPr>
             <a:r>
               <a:rPr lang="en-US" sz="825" dirty="0">
                 <a:solidFill>
@@ -5040,7 +4798,7 @@
           <a:bodyPr wrap="square" lIns="0" tIns="0" rIns="0" bIns="0" rtlCol="0" anchor="t"/>
           <a:lstStyle/>
           <a:p>
-            <a:pPr algn="r" indent="0" marL="0">
+            <a:pPr marL="0" indent="0" algn="r">
               <a:buNone/>
             </a:pPr>
             <a:r>
@@ -5054,9 +4812,6 @@
               </a:rPr>
               <a:t>4 </a:t>
             </a:r>
-            <a:pPr algn="r" indent="0" marL="0">
-              <a:buNone/>
-            </a:pPr>
             <a:r>
               <a:rPr lang="en-US" sz="825" dirty="0">
                 <a:solidFill>
@@ -5070,9 +4825,6 @@
               </a:rPr>
               <a:t>Tabs   </a:t>
             </a:r>
-            <a:pPr algn="r" indent="0" marL="0">
-              <a:buNone/>
-            </a:pPr>
             <a:r>
               <a:rPr lang="en-US" sz="825" b="1" dirty="0">
                 <a:solidFill>
@@ -5084,9 +4836,6 @@
               </a:rPr>
               <a:t>5 </a:t>
             </a:r>
-            <a:pPr algn="r" indent="0" marL="0">
-              <a:buNone/>
-            </a:pPr>
             <a:r>
               <a:rPr lang="en-US" sz="825" dirty="0">
                 <a:solidFill>
@@ -5100,9 +4849,6 @@
               </a:rPr>
               <a:t>Stack   </a:t>
             </a:r>
-            <a:pPr algn="r" indent="0" marL="0">
-              <a:buNone/>
-            </a:pPr>
             <a:r>
               <a:rPr lang="en-US" sz="825" b="1" dirty="0">
                 <a:solidFill>
@@ -5114,9 +4860,6 @@
               </a:rPr>
               <a:t>95% </a:t>
             </a:r>
-            <a:pPr algn="r" indent="0" marL="0">
-              <a:buNone/>
-            </a:pPr>
             <a:r>
               <a:rPr lang="en-US" sz="825" dirty="0">
                 <a:solidFill>
@@ -5150,6 +4893,7 @@
         <a:solidFill>
           <a:srgbClr val="FFFFFF"/>
         </a:solidFill>
+        <a:effectLst/>
       </p:bgPr>
     </p:bg>
     <p:spTree>
@@ -5251,7 +4995,7 @@
           <a:bodyPr wrap="square" lIns="0" tIns="0" rIns="0" bIns="0" rtlCol="0" anchor="ctr"/>
           <a:lstStyle/>
           <a:p>
-            <a:pPr indent="0" marL="0">
+            <a:pPr marL="0" indent="0">
               <a:buNone/>
             </a:pPr>
             <a:r>
@@ -5290,7 +5034,7 @@
           <a:bodyPr wrap="square" lIns="0" tIns="0" rIns="0" bIns="0" rtlCol="0" anchor="ctr"/>
           <a:lstStyle/>
           <a:p>
-            <a:pPr algn="r" indent="0" marL="0">
+            <a:pPr marL="0" indent="0" algn="r">
               <a:buNone/>
             </a:pPr>
             <a:r>
@@ -5304,9 +5048,6 @@
               </a:rPr>
               <a:t>02</a:t>
             </a:r>
-            <a:pPr algn="r" indent="0" marL="0">
-              <a:buNone/>
-            </a:pPr>
             <a:r>
               <a:rPr lang="en-US" sz="900" dirty="0">
                 <a:solidFill>
@@ -5343,11 +5084,11 @@
           <a:bodyPr wrap="square" lIns="0" tIns="0" rIns="0" bIns="0" rtlCol="0" anchor="t"/>
           <a:lstStyle/>
           <a:p>
-            <a:pPr indent="0" marL="0">
-              <a:buNone/>
-            </a:pPr>
-            <a:r>
-              <a:rPr lang="en-US" sz="900" b="1" spc="160" kern="0" dirty="0">
+            <a:pPr marL="0" indent="0">
+              <a:buNone/>
+            </a:pPr>
+            <a:r>
+              <a:rPr lang="en-US" sz="900" b="1" kern="0" spc="160" dirty="0">
                 <a:solidFill>
                   <a:srgbClr val="22C55E"/>
                 </a:solidFill>
@@ -5382,11 +5123,11 @@
           <a:bodyPr wrap="square" lIns="0" tIns="0" rIns="0" bIns="0" rtlCol="0" anchor="t"/>
           <a:lstStyle/>
           <a:p>
-            <a:pPr indent="0" marL="0">
-              <a:buNone/>
-            </a:pPr>
-            <a:r>
-              <a:rPr lang="en-US" sz="2550" b="1" spc="-50" kern="0" dirty="0">
+            <a:pPr marL="0" indent="0">
+              <a:buNone/>
+            </a:pPr>
+            <a:r>
+              <a:rPr lang="en-US" sz="2550" b="1" kern="0" spc="-50" dirty="0">
                 <a:solidFill>
                   <a:srgbClr val="0F172A"/>
                 </a:solidFill>
@@ -5421,7 +5162,7 @@
           <a:bodyPr wrap="square" lIns="0" tIns="0" rIns="0" bIns="0" rtlCol="0" anchor="t"/>
           <a:lstStyle/>
           <a:p>
-            <a:pPr indent="0" marL="0">
+            <a:pPr marL="0" indent="0">
               <a:buNone/>
             </a:pPr>
             <a:r>
@@ -5489,11 +5230,11 @@
           <a:bodyPr wrap="square" lIns="0" tIns="0" rIns="0" bIns="0" rtlCol="0" anchor="t"/>
           <a:lstStyle/>
           <a:p>
-            <a:pPr algn="ctr" indent="0" marL="0">
-              <a:buNone/>
-            </a:pPr>
-            <a:r>
-              <a:rPr lang="en-US" sz="788" b="1" spc="180" kern="0" dirty="0">
+            <a:pPr marL="0" indent="0" algn="ctr">
+              <a:buNone/>
+            </a:pPr>
+            <a:r>
+              <a:rPr lang="en-US" sz="788" b="1" kern="0" spc="180" dirty="0">
                 <a:solidFill>
                   <a:srgbClr val="15803D"/>
                 </a:solidFill>
@@ -5528,7 +5269,7 @@
           <a:bodyPr wrap="square" lIns="0" tIns="0" rIns="0" bIns="0" rtlCol="0" anchor="t"/>
           <a:lstStyle/>
           <a:p>
-            <a:pPr algn="ctr" indent="0" marL="0">
+            <a:pPr marL="0" indent="0" algn="ctr">
               <a:buNone/>
             </a:pPr>
             <a:r>
@@ -5567,7 +5308,7 @@
           <a:bodyPr wrap="square" lIns="0" tIns="0" rIns="0" bIns="0" rtlCol="0" anchor="t"/>
           <a:lstStyle/>
           <a:p>
-            <a:pPr algn="ctr" indent="0" marL="0">
+            <a:pPr marL="0" indent="0" algn="ctr">
               <a:buNone/>
             </a:pPr>
             <a:r>
@@ -5611,7 +5352,7 @@
             <a:prstDash val="solid"/>
           </a:ln>
           <a:effectLst>
-            <a:outerShdw sx="100000" sy="100000" kx="0" ky="0" algn="bl" rotWithShape="0" blurRad="101600" dist="25400" dir="5400000">
+            <a:outerShdw blurRad="101600" dist="25400" dir="5400000" algn="bl" rotWithShape="0">
               <a:srgbClr val="0F172A">
                 <a:alpha val="6000"/>
               </a:srgbClr>
@@ -5640,11 +5381,11 @@
           <a:bodyPr wrap="square" lIns="0" tIns="0" rIns="0" bIns="0" rtlCol="0" anchor="t"/>
           <a:lstStyle/>
           <a:p>
-            <a:pPr indent="0" marL="0">
-              <a:buNone/>
-            </a:pPr>
-            <a:r>
-              <a:rPr lang="en-US" sz="975" b="1" spc="-20" kern="0" dirty="0">
+            <a:pPr marL="0" indent="0">
+              <a:buNone/>
+            </a:pPr>
+            <a:r>
+              <a:rPr lang="en-US" sz="975" b="1" kern="0" spc="-20" dirty="0">
                 <a:solidFill>
                   <a:srgbClr val="0F172A"/>
                 </a:solidFill>
@@ -5701,11 +5442,11 @@
           <a:bodyPr wrap="square" lIns="0" tIns="0" rIns="0" bIns="0" rtlCol="0" anchor="ctr"/>
           <a:lstStyle/>
           <a:p>
-            <a:pPr algn="ctr" indent="0" marL="0">
-              <a:buNone/>
-            </a:pPr>
-            <a:r>
-              <a:rPr lang="en-US" sz="638" b="1" spc="50" kern="0" dirty="0">
+            <a:pPr marL="0" indent="0" algn="ctr">
+              <a:buNone/>
+            </a:pPr>
+            <a:r>
+              <a:rPr lang="en-US" sz="638" b="1" kern="0" spc="50" dirty="0">
                 <a:solidFill>
                   <a:srgbClr val="15803D"/>
                 </a:solidFill>
@@ -5740,7 +5481,7 @@
           <a:bodyPr wrap="square" lIns="0" tIns="0" rIns="0" bIns="0" rtlCol="0" anchor="t"/>
           <a:lstStyle/>
           <a:p>
-            <a:pPr indent="0" marL="0">
+            <a:pPr marL="0" indent="0">
               <a:buNone/>
             </a:pPr>
             <a:r>
@@ -5801,7 +5542,7 @@
           <a:bodyPr wrap="square" lIns="0" tIns="0" rIns="0" bIns="0" rtlCol="0" anchor="t"/>
           <a:lstStyle/>
           <a:p>
-            <a:pPr indent="0" marL="0">
+            <a:pPr marL="0" indent="0">
               <a:lnSpc>
                 <a:spcPct val="130000"/>
               </a:lnSpc>
@@ -5865,7 +5606,7 @@
           <a:bodyPr wrap="square" lIns="0" tIns="0" rIns="0" bIns="0" rtlCol="0" anchor="t"/>
           <a:lstStyle/>
           <a:p>
-            <a:pPr indent="0" marL="0">
+            <a:pPr marL="0" indent="0">
               <a:lnSpc>
                 <a:spcPct val="130000"/>
               </a:lnSpc>
@@ -5929,7 +5670,7 @@
           <a:bodyPr wrap="square" lIns="0" tIns="0" rIns="0" bIns="0" rtlCol="0" anchor="t"/>
           <a:lstStyle/>
           <a:p>
-            <a:pPr indent="0" marL="0">
+            <a:pPr marL="0" indent="0">
               <a:lnSpc>
                 <a:spcPct val="130000"/>
               </a:lnSpc>
@@ -5993,7 +5734,7 @@
           <a:bodyPr wrap="square" lIns="0" tIns="0" rIns="0" bIns="0" rtlCol="0" anchor="t"/>
           <a:lstStyle/>
           <a:p>
-            <a:pPr indent="0" marL="0">
+            <a:pPr marL="0" indent="0">
               <a:lnSpc>
                 <a:spcPct val="130000"/>
               </a:lnSpc>
@@ -6040,7 +5781,7 @@
             <a:prstDash val="solid"/>
           </a:ln>
           <a:effectLst>
-            <a:outerShdw sx="100000" sy="100000" kx="0" ky="0" algn="bl" rotWithShape="0" blurRad="101600" dist="25400" dir="5400000">
+            <a:outerShdw blurRad="101600" dist="25400" dir="5400000" algn="bl" rotWithShape="0">
               <a:srgbClr val="0F172A">
                 <a:alpha val="6000"/>
               </a:srgbClr>
@@ -6069,11 +5810,11 @@
           <a:bodyPr wrap="square" lIns="0" tIns="0" rIns="0" bIns="0" rtlCol="0" anchor="t"/>
           <a:lstStyle/>
           <a:p>
-            <a:pPr indent="0" marL="0">
-              <a:buNone/>
-            </a:pPr>
-            <a:r>
-              <a:rPr lang="en-US" sz="975" b="1" spc="-20" kern="0" dirty="0">
+            <a:pPr marL="0" indent="0">
+              <a:buNone/>
+            </a:pPr>
+            <a:r>
+              <a:rPr lang="en-US" sz="975" b="1" kern="0" spc="-20" dirty="0">
                 <a:solidFill>
                   <a:srgbClr val="0F172A"/>
                 </a:solidFill>
@@ -6130,11 +5871,11 @@
           <a:bodyPr wrap="square" lIns="0" tIns="0" rIns="0" bIns="0" rtlCol="0" anchor="ctr"/>
           <a:lstStyle/>
           <a:p>
-            <a:pPr algn="ctr" indent="0" marL="0">
-              <a:buNone/>
-            </a:pPr>
-            <a:r>
-              <a:rPr lang="en-US" sz="638" b="1" spc="50" kern="0" dirty="0">
+            <a:pPr marL="0" indent="0" algn="ctr">
+              <a:buNone/>
+            </a:pPr>
+            <a:r>
+              <a:rPr lang="en-US" sz="638" b="1" kern="0" spc="50" dirty="0">
                 <a:solidFill>
                   <a:srgbClr val="15803D"/>
                 </a:solidFill>
@@ -6169,7 +5910,7 @@
           <a:bodyPr wrap="square" lIns="0" tIns="0" rIns="0" bIns="0" rtlCol="0" anchor="t"/>
           <a:lstStyle/>
           <a:p>
-            <a:pPr indent="0" marL="0">
+            <a:pPr marL="0" indent="0">
               <a:buNone/>
             </a:pPr>
             <a:r>
@@ -6230,7 +5971,7 @@
           <a:bodyPr wrap="square" lIns="0" tIns="0" rIns="0" bIns="0" rtlCol="0" anchor="t"/>
           <a:lstStyle/>
           <a:p>
-            <a:pPr indent="0" marL="0">
+            <a:pPr marL="0" indent="0">
               <a:lnSpc>
                 <a:spcPct val="130000"/>
               </a:lnSpc>
@@ -6294,7 +6035,7 @@
           <a:bodyPr wrap="square" lIns="0" tIns="0" rIns="0" bIns="0" rtlCol="0" anchor="t"/>
           <a:lstStyle/>
           <a:p>
-            <a:pPr indent="0" marL="0">
+            <a:pPr marL="0" indent="0">
               <a:lnSpc>
                 <a:spcPct val="130000"/>
               </a:lnSpc>
@@ -6358,7 +6099,7 @@
           <a:bodyPr wrap="square" lIns="0" tIns="0" rIns="0" bIns="0" rtlCol="0" anchor="t"/>
           <a:lstStyle/>
           <a:p>
-            <a:pPr indent="0" marL="0">
+            <a:pPr marL="0" indent="0">
               <a:lnSpc>
                 <a:spcPct val="130000"/>
               </a:lnSpc>
@@ -6429,11 +6170,11 @@
           <a:bodyPr wrap="square" lIns="0" tIns="0" rIns="0" bIns="0" rtlCol="0" anchor="t"/>
           <a:lstStyle/>
           <a:p>
-            <a:pPr algn="ctr" indent="0" marL="0">
-              <a:buNone/>
-            </a:pPr>
-            <a:r>
-              <a:rPr lang="en-US" sz="788" b="1" spc="180" kern="0" dirty="0">
+            <a:pPr marL="0" indent="0" algn="ctr">
+              <a:buNone/>
+            </a:pPr>
+            <a:r>
+              <a:rPr lang="en-US" sz="788" b="1" kern="0" spc="180" dirty="0">
                 <a:solidFill>
                   <a:srgbClr val="15803D"/>
                 </a:solidFill>
@@ -6468,7 +6209,7 @@
           <a:bodyPr wrap="square" lIns="0" tIns="0" rIns="0" bIns="0" rtlCol="0" anchor="t"/>
           <a:lstStyle/>
           <a:p>
-            <a:pPr algn="ctr" indent="0" marL="0">
+            <a:pPr marL="0" indent="0" algn="ctr">
               <a:buNone/>
             </a:pPr>
             <a:r>
@@ -6507,7 +6248,7 @@
           <a:bodyPr wrap="square" lIns="0" tIns="0" rIns="0" bIns="0" rtlCol="0" anchor="t"/>
           <a:lstStyle/>
           <a:p>
-            <a:pPr algn="ctr" indent="0" marL="0">
+            <a:pPr marL="0" indent="0" algn="ctr">
               <a:buNone/>
             </a:pPr>
             <a:r>
@@ -6551,7 +6292,7 @@
             <a:prstDash val="solid"/>
           </a:ln>
           <a:effectLst>
-            <a:outerShdw sx="100000" sy="100000" kx="0" ky="0" algn="bl" rotWithShape="0" blurRad="101600" dist="25400" dir="5400000">
+            <a:outerShdw blurRad="101600" dist="25400" dir="5400000" algn="bl" rotWithShape="0">
               <a:srgbClr val="0F172A">
                 <a:alpha val="6000"/>
               </a:srgbClr>
@@ -6580,11 +6321,11 @@
           <a:bodyPr wrap="square" lIns="0" tIns="0" rIns="0" bIns="0" rtlCol="0" anchor="t"/>
           <a:lstStyle/>
           <a:p>
-            <a:pPr indent="0" marL="0">
-              <a:buNone/>
-            </a:pPr>
-            <a:r>
-              <a:rPr lang="en-US" sz="975" b="1" spc="-20" kern="0" dirty="0">
+            <a:pPr marL="0" indent="0">
+              <a:buNone/>
+            </a:pPr>
+            <a:r>
+              <a:rPr lang="en-US" sz="975" b="1" kern="0" spc="-20" dirty="0">
                 <a:solidFill>
                   <a:srgbClr val="0F172A"/>
                 </a:solidFill>
@@ -6641,11 +6382,11 @@
           <a:bodyPr wrap="square" lIns="0" tIns="0" rIns="0" bIns="0" rtlCol="0" anchor="ctr"/>
           <a:lstStyle/>
           <a:p>
-            <a:pPr algn="ctr" indent="0" marL="0">
-              <a:buNone/>
-            </a:pPr>
-            <a:r>
-              <a:rPr lang="en-US" sz="638" b="1" spc="50" kern="0" dirty="0">
+            <a:pPr marL="0" indent="0" algn="ctr">
+              <a:buNone/>
+            </a:pPr>
+            <a:r>
+              <a:rPr lang="en-US" sz="638" b="1" kern="0" spc="50" dirty="0">
                 <a:solidFill>
                   <a:srgbClr val="15803D"/>
                 </a:solidFill>
@@ -6680,7 +6421,7 @@
           <a:bodyPr wrap="square" lIns="0" tIns="0" rIns="0" bIns="0" rtlCol="0" anchor="t"/>
           <a:lstStyle/>
           <a:p>
-            <a:pPr indent="0" marL="0">
+            <a:pPr marL="0" indent="0">
               <a:buNone/>
             </a:pPr>
             <a:r>
@@ -6741,7 +6482,7 @@
           <a:bodyPr wrap="square" lIns="0" tIns="0" rIns="0" bIns="0" rtlCol="0" anchor="t"/>
           <a:lstStyle/>
           <a:p>
-            <a:pPr indent="0" marL="0">
+            <a:pPr marL="0" indent="0">
               <a:lnSpc>
                 <a:spcPct val="130000"/>
               </a:lnSpc>
@@ -6805,7 +6546,7 @@
           <a:bodyPr wrap="square" lIns="0" tIns="0" rIns="0" bIns="0" rtlCol="0" anchor="t"/>
           <a:lstStyle/>
           <a:p>
-            <a:pPr indent="0" marL="0">
+            <a:pPr marL="0" indent="0">
               <a:lnSpc>
                 <a:spcPct val="130000"/>
               </a:lnSpc>
@@ -6869,7 +6610,7 @@
           <a:bodyPr wrap="square" lIns="0" tIns="0" rIns="0" bIns="0" rtlCol="0" anchor="t"/>
           <a:lstStyle/>
           <a:p>
-            <a:pPr indent="0" marL="0">
+            <a:pPr marL="0" indent="0">
               <a:lnSpc>
                 <a:spcPct val="130000"/>
               </a:lnSpc>
@@ -6916,7 +6657,7 @@
             <a:prstDash val="solid"/>
           </a:ln>
           <a:effectLst>
-            <a:outerShdw sx="100000" sy="100000" kx="0" ky="0" algn="bl" rotWithShape="0" blurRad="101600" dist="25400" dir="5400000">
+            <a:outerShdw blurRad="101600" dist="25400" dir="5400000" algn="bl" rotWithShape="0">
               <a:srgbClr val="0F172A">
                 <a:alpha val="6000"/>
               </a:srgbClr>
@@ -6945,11 +6686,11 @@
           <a:bodyPr wrap="square" lIns="0" tIns="0" rIns="0" bIns="0" rtlCol="0" anchor="t"/>
           <a:lstStyle/>
           <a:p>
-            <a:pPr indent="0" marL="0">
-              <a:buNone/>
-            </a:pPr>
-            <a:r>
-              <a:rPr lang="en-US" sz="975" b="1" spc="-20" kern="0" dirty="0">
+            <a:pPr marL="0" indent="0">
+              <a:buNone/>
+            </a:pPr>
+            <a:r>
+              <a:rPr lang="en-US" sz="975" b="1" kern="0" spc="-20" dirty="0">
                 <a:solidFill>
                   <a:srgbClr val="0F172A"/>
                 </a:solidFill>
@@ -7006,11 +6747,11 @@
           <a:bodyPr wrap="square" lIns="0" tIns="0" rIns="0" bIns="0" rtlCol="0" anchor="ctr"/>
           <a:lstStyle/>
           <a:p>
-            <a:pPr algn="ctr" indent="0" marL="0">
-              <a:buNone/>
-            </a:pPr>
-            <a:r>
-              <a:rPr lang="en-US" sz="638" b="1" spc="50" kern="0" dirty="0">
+            <a:pPr marL="0" indent="0" algn="ctr">
+              <a:buNone/>
+            </a:pPr>
+            <a:r>
+              <a:rPr lang="en-US" sz="638" b="1" kern="0" spc="50" dirty="0">
                 <a:solidFill>
                   <a:srgbClr val="15803D"/>
                 </a:solidFill>
@@ -7045,7 +6786,7 @@
           <a:bodyPr wrap="square" lIns="0" tIns="0" rIns="0" bIns="0" rtlCol="0" anchor="t"/>
           <a:lstStyle/>
           <a:p>
-            <a:pPr indent="0" marL="0">
+            <a:pPr marL="0" indent="0">
               <a:buNone/>
             </a:pPr>
             <a:r>
@@ -7106,7 +6847,7 @@
           <a:bodyPr wrap="square" lIns="0" tIns="0" rIns="0" bIns="0" rtlCol="0" anchor="t"/>
           <a:lstStyle/>
           <a:p>
-            <a:pPr indent="0" marL="0">
+            <a:pPr marL="0" indent="0">
               <a:lnSpc>
                 <a:spcPct val="130000"/>
               </a:lnSpc>
@@ -7170,7 +6911,7 @@
           <a:bodyPr wrap="square" lIns="0" tIns="0" rIns="0" bIns="0" rtlCol="0" anchor="t"/>
           <a:lstStyle/>
           <a:p>
-            <a:pPr indent="0" marL="0">
+            <a:pPr marL="0" indent="0">
               <a:lnSpc>
                 <a:spcPct val="130000"/>
               </a:lnSpc>
@@ -7234,7 +6975,7 @@
           <a:bodyPr wrap="square" lIns="0" tIns="0" rIns="0" bIns="0" rtlCol="0" anchor="t"/>
           <a:lstStyle/>
           <a:p>
-            <a:pPr indent="0" marL="0">
+            <a:pPr marL="0" indent="0">
               <a:lnSpc>
                 <a:spcPct val="130000"/>
               </a:lnSpc>
@@ -7298,7 +7039,7 @@
           <a:bodyPr wrap="square" lIns="0" tIns="0" rIns="0" bIns="0" rtlCol="0" anchor="t"/>
           <a:lstStyle/>
           <a:p>
-            <a:pPr indent="0" marL="0">
+            <a:pPr marL="0" indent="0">
               <a:lnSpc>
                 <a:spcPct val="130000"/>
               </a:lnSpc>
@@ -7362,7 +7103,7 @@
           <a:bodyPr wrap="square" lIns="0" tIns="0" rIns="0" bIns="0" rtlCol="0" anchor="t"/>
           <a:lstStyle/>
           <a:p>
-            <a:pPr indent="0" marL="0">
+            <a:pPr marL="0" indent="0">
               <a:lnSpc>
                 <a:spcPct val="130000"/>
               </a:lnSpc>
@@ -7433,11 +7174,11 @@
           <a:bodyPr wrap="square" lIns="0" tIns="0" rIns="0" bIns="0" rtlCol="0" anchor="t"/>
           <a:lstStyle/>
           <a:p>
-            <a:pPr algn="ctr" indent="0" marL="0">
-              <a:buNone/>
-            </a:pPr>
-            <a:r>
-              <a:rPr lang="en-US" sz="788" b="1" spc="180" kern="0" dirty="0">
+            <a:pPr marL="0" indent="0" algn="ctr">
+              <a:buNone/>
+            </a:pPr>
+            <a:r>
+              <a:rPr lang="en-US" sz="788" b="1" kern="0" spc="180" dirty="0">
                 <a:solidFill>
                   <a:srgbClr val="15803D"/>
                 </a:solidFill>
@@ -7472,7 +7213,7 @@
           <a:bodyPr wrap="square" lIns="0" tIns="0" rIns="0" bIns="0" rtlCol="0" anchor="t"/>
           <a:lstStyle/>
           <a:p>
-            <a:pPr algn="ctr" indent="0" marL="0">
+            <a:pPr marL="0" indent="0" algn="ctr">
               <a:buNone/>
             </a:pPr>
             <a:r>
@@ -7511,7 +7252,7 @@
           <a:bodyPr wrap="square" lIns="0" tIns="0" rIns="0" bIns="0" rtlCol="0" anchor="t"/>
           <a:lstStyle/>
           <a:p>
-            <a:pPr algn="ctr" indent="0" marL="0">
+            <a:pPr marL="0" indent="0" algn="ctr">
               <a:buNone/>
             </a:pPr>
             <a:r>
@@ -7555,7 +7296,7 @@
             <a:prstDash val="solid"/>
           </a:ln>
           <a:effectLst>
-            <a:outerShdw sx="100000" sy="100000" kx="0" ky="0" algn="bl" rotWithShape="0" blurRad="101600" dist="25400" dir="5400000">
+            <a:outerShdw blurRad="101600" dist="25400" dir="5400000" algn="bl" rotWithShape="0">
               <a:srgbClr val="0F172A">
                 <a:alpha val="6000"/>
               </a:srgbClr>
@@ -7584,11 +7325,11 @@
           <a:bodyPr wrap="square" lIns="0" tIns="0" rIns="0" bIns="0" rtlCol="0" anchor="t"/>
           <a:lstStyle/>
           <a:p>
-            <a:pPr indent="0" marL="0">
-              <a:buNone/>
-            </a:pPr>
-            <a:r>
-              <a:rPr lang="en-US" sz="975" b="1" spc="-20" kern="0" dirty="0">
+            <a:pPr marL="0" indent="0">
+              <a:buNone/>
+            </a:pPr>
+            <a:r>
+              <a:rPr lang="en-US" sz="975" b="1" kern="0" spc="-20" dirty="0">
                 <a:solidFill>
                   <a:srgbClr val="0F172A"/>
                 </a:solidFill>
@@ -7645,11 +7386,11 @@
           <a:bodyPr wrap="square" lIns="0" tIns="0" rIns="0" bIns="0" rtlCol="0" anchor="ctr"/>
           <a:lstStyle/>
           <a:p>
-            <a:pPr algn="ctr" indent="0" marL="0">
-              <a:buNone/>
-            </a:pPr>
-            <a:r>
-              <a:rPr lang="en-US" sz="638" b="1" spc="50" kern="0" dirty="0">
+            <a:pPr marL="0" indent="0" algn="ctr">
+              <a:buNone/>
+            </a:pPr>
+            <a:r>
+              <a:rPr lang="en-US" sz="638" b="1" kern="0" spc="50" dirty="0">
                 <a:solidFill>
                   <a:srgbClr val="1E3A8A"/>
                 </a:solidFill>
@@ -7684,7 +7425,7 @@
           <a:bodyPr wrap="square" lIns="0" tIns="0" rIns="0" bIns="0" rtlCol="0" anchor="t"/>
           <a:lstStyle/>
           <a:p>
-            <a:pPr indent="0" marL="0">
+            <a:pPr marL="0" indent="0">
               <a:buNone/>
             </a:pPr>
             <a:r>
@@ -7745,7 +7486,7 @@
           <a:bodyPr wrap="square" lIns="0" tIns="0" rIns="0" bIns="0" rtlCol="0" anchor="t"/>
           <a:lstStyle/>
           <a:p>
-            <a:pPr indent="0" marL="0">
+            <a:pPr marL="0" indent="0">
               <a:lnSpc>
                 <a:spcPct val="130000"/>
               </a:lnSpc>
@@ -7809,7 +7550,7 @@
           <a:bodyPr wrap="square" lIns="0" tIns="0" rIns="0" bIns="0" rtlCol="0" anchor="t"/>
           <a:lstStyle/>
           <a:p>
-            <a:pPr indent="0" marL="0">
+            <a:pPr marL="0" indent="0">
               <a:lnSpc>
                 <a:spcPct val="130000"/>
               </a:lnSpc>
@@ -7873,7 +7614,7 @@
           <a:bodyPr wrap="square" lIns="0" tIns="0" rIns="0" bIns="0" rtlCol="0" anchor="t"/>
           <a:lstStyle/>
           <a:p>
-            <a:pPr indent="0" marL="0">
+            <a:pPr marL="0" indent="0">
               <a:lnSpc>
                 <a:spcPct val="130000"/>
               </a:lnSpc>
@@ -7920,7 +7661,7 @@
             <a:prstDash val="solid"/>
           </a:ln>
           <a:effectLst>
-            <a:outerShdw sx="100000" sy="100000" kx="0" ky="0" algn="bl" rotWithShape="0" blurRad="101600" dist="25400" dir="5400000">
+            <a:outerShdw blurRad="101600" dist="25400" dir="5400000" algn="bl" rotWithShape="0">
               <a:srgbClr val="0F172A">
                 <a:alpha val="6000"/>
               </a:srgbClr>
@@ -7949,11 +7690,11 @@
           <a:bodyPr wrap="square" lIns="0" tIns="0" rIns="0" bIns="0" rtlCol="0" anchor="t"/>
           <a:lstStyle/>
           <a:p>
-            <a:pPr indent="0" marL="0">
-              <a:buNone/>
-            </a:pPr>
-            <a:r>
-              <a:rPr lang="en-US" sz="975" b="1" spc="-20" kern="0" dirty="0">
+            <a:pPr marL="0" indent="0">
+              <a:buNone/>
+            </a:pPr>
+            <a:r>
+              <a:rPr lang="en-US" sz="975" b="1" kern="0" spc="-20" dirty="0">
                 <a:solidFill>
                   <a:srgbClr val="0F172A"/>
                 </a:solidFill>
@@ -8010,11 +7751,11 @@
           <a:bodyPr wrap="square" lIns="0" tIns="0" rIns="0" bIns="0" rtlCol="0" anchor="ctr"/>
           <a:lstStyle/>
           <a:p>
-            <a:pPr algn="ctr" indent="0" marL="0">
-              <a:buNone/>
-            </a:pPr>
-            <a:r>
-              <a:rPr lang="en-US" sz="638" b="1" spc="50" kern="0" dirty="0">
+            <a:pPr marL="0" indent="0" algn="ctr">
+              <a:buNone/>
+            </a:pPr>
+            <a:r>
+              <a:rPr lang="en-US" sz="638" b="1" kern="0" spc="50" dirty="0">
                 <a:solidFill>
                   <a:srgbClr val="1E3A8A"/>
                 </a:solidFill>
@@ -8049,7 +7790,7 @@
           <a:bodyPr wrap="square" lIns="0" tIns="0" rIns="0" bIns="0" rtlCol="0" anchor="t"/>
           <a:lstStyle/>
           <a:p>
-            <a:pPr indent="0" marL="0">
+            <a:pPr marL="0" indent="0">
               <a:buNone/>
             </a:pPr>
             <a:r>
@@ -8110,7 +7851,7 @@
           <a:bodyPr wrap="square" lIns="0" tIns="0" rIns="0" bIns="0" rtlCol="0" anchor="t"/>
           <a:lstStyle/>
           <a:p>
-            <a:pPr indent="0" marL="0">
+            <a:pPr marL="0" indent="0">
               <a:lnSpc>
                 <a:spcPct val="130000"/>
               </a:lnSpc>
@@ -8174,7 +7915,7 @@
           <a:bodyPr wrap="square" lIns="0" tIns="0" rIns="0" bIns="0" rtlCol="0" anchor="t"/>
           <a:lstStyle/>
           <a:p>
-            <a:pPr indent="0" marL="0">
+            <a:pPr marL="0" indent="0">
               <a:lnSpc>
                 <a:spcPct val="130000"/>
               </a:lnSpc>
@@ -8245,11 +7986,11 @@
           <a:bodyPr wrap="square" lIns="0" tIns="0" rIns="0" bIns="0" rtlCol="0" anchor="t"/>
           <a:lstStyle/>
           <a:p>
-            <a:pPr algn="ctr" indent="0" marL="0">
-              <a:buNone/>
-            </a:pPr>
-            <a:r>
-              <a:rPr lang="en-US" sz="788" b="1" spc="180" kern="0" dirty="0">
+            <a:pPr marL="0" indent="0" algn="ctr">
+              <a:buNone/>
+            </a:pPr>
+            <a:r>
+              <a:rPr lang="en-US" sz="788" b="1" kern="0" spc="180" dirty="0">
                 <a:solidFill>
                   <a:srgbClr val="15803D"/>
                 </a:solidFill>
@@ -8284,7 +8025,7 @@
           <a:bodyPr wrap="square" lIns="0" tIns="0" rIns="0" bIns="0" rtlCol="0" anchor="t"/>
           <a:lstStyle/>
           <a:p>
-            <a:pPr algn="ctr" indent="0" marL="0">
+            <a:pPr marL="0" indent="0" algn="ctr">
               <a:buNone/>
             </a:pPr>
             <a:r>
@@ -8323,7 +8064,7 @@
           <a:bodyPr wrap="square" lIns="0" tIns="0" rIns="0" bIns="0" rtlCol="0" anchor="t"/>
           <a:lstStyle/>
           <a:p>
-            <a:pPr algn="ctr" indent="0" marL="0">
+            <a:pPr marL="0" indent="0" algn="ctr">
               <a:buNone/>
             </a:pPr>
             <a:r>
@@ -8367,7 +8108,7 @@
             <a:prstDash val="solid"/>
           </a:ln>
           <a:effectLst>
-            <a:outerShdw sx="100000" sy="100000" kx="0" ky="0" algn="bl" rotWithShape="0" blurRad="101600" dist="25400" dir="5400000">
+            <a:outerShdw blurRad="101600" dist="25400" dir="5400000" algn="bl" rotWithShape="0">
               <a:srgbClr val="0F172A">
                 <a:alpha val="6000"/>
               </a:srgbClr>
@@ -8396,11 +8137,11 @@
           <a:bodyPr wrap="square" lIns="0" tIns="0" rIns="0" bIns="0" rtlCol="0" anchor="t"/>
           <a:lstStyle/>
           <a:p>
-            <a:pPr indent="0" marL="0">
-              <a:buNone/>
-            </a:pPr>
-            <a:r>
-              <a:rPr lang="en-US" sz="975" b="1" spc="-20" kern="0" dirty="0">
+            <a:pPr marL="0" indent="0">
+              <a:buNone/>
+            </a:pPr>
+            <a:r>
+              <a:rPr lang="en-US" sz="975" b="1" kern="0" spc="-20" dirty="0">
                 <a:solidFill>
                   <a:srgbClr val="0F172A"/>
                 </a:solidFill>
@@ -8457,11 +8198,11 @@
           <a:bodyPr wrap="square" lIns="0" tIns="0" rIns="0" bIns="0" rtlCol="0" anchor="ctr"/>
           <a:lstStyle/>
           <a:p>
-            <a:pPr algn="ctr" indent="0" marL="0">
-              <a:buNone/>
-            </a:pPr>
-            <a:r>
-              <a:rPr lang="en-US" sz="638" b="1" spc="50" kern="0" dirty="0">
+            <a:pPr marL="0" indent="0" algn="ctr">
+              <a:buNone/>
+            </a:pPr>
+            <a:r>
+              <a:rPr lang="en-US" sz="638" b="1" kern="0" spc="50" dirty="0">
                 <a:solidFill>
                   <a:srgbClr val="1E3A8A"/>
                 </a:solidFill>
@@ -8496,7 +8237,7 @@
           <a:bodyPr wrap="square" lIns="0" tIns="0" rIns="0" bIns="0" rtlCol="0" anchor="t"/>
           <a:lstStyle/>
           <a:p>
-            <a:pPr indent="0" marL="0">
+            <a:pPr marL="0" indent="0">
               <a:buNone/>
             </a:pPr>
             <a:r>
@@ -8557,7 +8298,7 @@
           <a:bodyPr wrap="square" lIns="0" tIns="0" rIns="0" bIns="0" rtlCol="0" anchor="t"/>
           <a:lstStyle/>
           <a:p>
-            <a:pPr indent="0" marL="0">
+            <a:pPr marL="0" indent="0">
               <a:lnSpc>
                 <a:spcPct val="130000"/>
               </a:lnSpc>
@@ -8621,7 +8362,7 @@
           <a:bodyPr wrap="square" lIns="0" tIns="0" rIns="0" bIns="0" rtlCol="0" anchor="t"/>
           <a:lstStyle/>
           <a:p>
-            <a:pPr indent="0" marL="0">
+            <a:pPr marL="0" indent="0">
               <a:lnSpc>
                 <a:spcPct val="130000"/>
               </a:lnSpc>
@@ -8685,7 +8426,7 @@
           <a:bodyPr wrap="square" lIns="0" tIns="0" rIns="0" bIns="0" rtlCol="0" anchor="t"/>
           <a:lstStyle/>
           <a:p>
-            <a:pPr indent="0" marL="0">
+            <a:pPr marL="0" indent="0">
               <a:lnSpc>
                 <a:spcPct val="130000"/>
               </a:lnSpc>
@@ -8732,7 +8473,7 @@
             <a:prstDash val="solid"/>
           </a:ln>
           <a:effectLst>
-            <a:outerShdw sx="100000" sy="100000" kx="0" ky="0" algn="bl" rotWithShape="0" blurRad="101600" dist="25400" dir="5400000">
+            <a:outerShdw blurRad="101600" dist="25400" dir="5400000" algn="bl" rotWithShape="0">
               <a:srgbClr val="0F172A">
                 <a:alpha val="6000"/>
               </a:srgbClr>
@@ -8761,11 +8502,11 @@
           <a:bodyPr wrap="square" lIns="0" tIns="0" rIns="0" bIns="0" rtlCol="0" anchor="t"/>
           <a:lstStyle/>
           <a:p>
-            <a:pPr indent="0" marL="0">
-              <a:buNone/>
-            </a:pPr>
-            <a:r>
-              <a:rPr lang="en-US" sz="975" b="1" spc="-20" kern="0" dirty="0">
+            <a:pPr marL="0" indent="0">
+              <a:buNone/>
+            </a:pPr>
+            <a:r>
+              <a:rPr lang="en-US" sz="975" b="1" kern="0" spc="-20" dirty="0">
                 <a:solidFill>
                   <a:srgbClr val="0F172A"/>
                 </a:solidFill>
@@ -8822,11 +8563,11 @@
           <a:bodyPr wrap="square" lIns="0" tIns="0" rIns="0" bIns="0" rtlCol="0" anchor="ctr"/>
           <a:lstStyle/>
           <a:p>
-            <a:pPr algn="ctr" indent="0" marL="0">
-              <a:buNone/>
-            </a:pPr>
-            <a:r>
-              <a:rPr lang="en-US" sz="638" b="1" spc="50" kern="0" dirty="0">
+            <a:pPr marL="0" indent="0" algn="ctr">
+              <a:buNone/>
+            </a:pPr>
+            <a:r>
+              <a:rPr lang="en-US" sz="638" b="1" kern="0" spc="50" dirty="0">
                 <a:solidFill>
                   <a:srgbClr val="92400E"/>
                 </a:solidFill>
@@ -8861,7 +8602,7 @@
           <a:bodyPr wrap="square" lIns="0" tIns="0" rIns="0" bIns="0" rtlCol="0" anchor="t"/>
           <a:lstStyle/>
           <a:p>
-            <a:pPr indent="0" marL="0">
+            <a:pPr marL="0" indent="0">
               <a:buNone/>
             </a:pPr>
             <a:r>
@@ -8922,7 +8663,7 @@
           <a:bodyPr wrap="square" lIns="0" tIns="0" rIns="0" bIns="0" rtlCol="0" anchor="t"/>
           <a:lstStyle/>
           <a:p>
-            <a:pPr indent="0" marL="0">
+            <a:pPr marL="0" indent="0">
               <a:lnSpc>
                 <a:spcPct val="130000"/>
               </a:lnSpc>
@@ -8986,7 +8727,7 @@
           <a:bodyPr wrap="square" lIns="0" tIns="0" rIns="0" bIns="0" rtlCol="0" anchor="t"/>
           <a:lstStyle/>
           <a:p>
-            <a:pPr indent="0" marL="0">
+            <a:pPr marL="0" indent="0">
               <a:lnSpc>
                 <a:spcPct val="130000"/>
               </a:lnSpc>
@@ -9050,7 +8791,7 @@
           <a:bodyPr wrap="square" lIns="0" tIns="0" rIns="0" bIns="0" rtlCol="0" anchor="t"/>
           <a:lstStyle/>
           <a:p>
-            <a:pPr indent="0" marL="0">
+            <a:pPr marL="0" indent="0">
               <a:lnSpc>
                 <a:spcPct val="130000"/>
               </a:lnSpc>
@@ -9092,11 +8833,11 @@
           <a:bodyPr wrap="square" lIns="0" tIns="0" rIns="0" bIns="0" rtlCol="0" anchor="t"/>
           <a:lstStyle/>
           <a:p>
-            <a:pPr indent="0" marL="0">
-              <a:buNone/>
-            </a:pPr>
-            <a:r>
-              <a:rPr lang="en-US" sz="825" b="1" spc="140" kern="0" dirty="0">
+            <a:pPr marL="0" indent="0">
+              <a:buNone/>
+            </a:pPr>
+            <a:r>
+              <a:rPr lang="en-US" sz="825" b="1" kern="0" spc="140" dirty="0">
                 <a:solidFill>
                   <a:srgbClr val="D97706"/>
                 </a:solidFill>
@@ -9118,7 +8859,7 @@
         </p:nvSpPr>
         <p:spPr>
           <a:xfrm>
-            <a:off x="1904952" y="6305392"/>
+            <a:off x="1257268" y="6314916"/>
             <a:ext cx="6857829" cy="152396"/>
           </a:xfrm>
           <a:prstGeom prst="rect">
@@ -9131,7 +8872,7 @@
           <a:bodyPr wrap="square" lIns="0" tIns="0" rIns="0" bIns="0" rtlCol="0" anchor="t"/>
           <a:lstStyle/>
           <a:p>
-            <a:pPr algn="ctr" indent="0" marL="0">
+            <a:pPr marL="0" indent="0">
               <a:buNone/>
             </a:pPr>
             <a:r>
@@ -9145,9 +8886,6 @@
               </a:rPr>
               <a:t>홈·지도 </a:t>
             </a:r>
-            <a:pPr algn="ctr" indent="0" marL="0">
-              <a:buNone/>
-            </a:pPr>
             <a:r>
               <a:rPr lang="en-US" sz="825" b="1" dirty="0">
                 <a:solidFill>
@@ -9159,9 +8897,6 @@
               </a:rPr>
               <a:t>→ </a:t>
             </a:r>
-            <a:pPr algn="ctr" indent="0" marL="0">
-              <a:buNone/>
-            </a:pPr>
             <a:r>
               <a:rPr lang="en-US" sz="825" dirty="0">
                 <a:solidFill>
@@ -9173,9 +8908,6 @@
               </a:rPr>
               <a:t>상세 보고서 </a:t>
             </a:r>
-            <a:pPr algn="ctr" indent="0" marL="0">
-              <a:buNone/>
-            </a:pPr>
             <a:r>
               <a:rPr lang="en-US" sz="825" b="1" dirty="0">
                 <a:solidFill>
@@ -9187,9 +8919,6 @@
               </a:rPr>
               <a:t>→ </a:t>
             </a:r>
-            <a:pPr algn="ctr" indent="0" marL="0">
-              <a:buNone/>
-            </a:pPr>
             <a:r>
               <a:rPr lang="en-US" sz="825" dirty="0">
                 <a:solidFill>
@@ -9201,9 +8930,6 @@
               </a:rPr>
               <a:t>리뷰·좋아요 </a:t>
             </a:r>
-            <a:pPr algn="ctr" indent="0" marL="0">
-              <a:buNone/>
-            </a:pPr>
             <a:r>
               <a:rPr lang="en-US" sz="825" b="1" dirty="0">
                 <a:solidFill>
@@ -9215,9 +8941,6 @@
               </a:rPr>
               <a:t>→ </a:t>
             </a:r>
-            <a:pPr algn="ctr" indent="0" marL="0">
-              <a:buNone/>
-            </a:pPr>
             <a:r>
               <a:rPr lang="en-US" sz="825" dirty="0">
                 <a:solidFill>
@@ -9254,7 +8977,7 @@
           <a:bodyPr wrap="square" lIns="0" tIns="0" rIns="0" bIns="0" rtlCol="0" anchor="t"/>
           <a:lstStyle/>
           <a:p>
-            <a:pPr algn="r" indent="0" marL="0">
+            <a:pPr marL="0" indent="0" algn="r">
               <a:buNone/>
             </a:pPr>
             <a:r>
@@ -9268,9 +8991,6 @@
               </a:rPr>
               <a:t>4 </a:t>
             </a:r>
-            <a:pPr algn="r" indent="0" marL="0">
-              <a:buNone/>
-            </a:pPr>
             <a:r>
               <a:rPr lang="en-US" sz="825" dirty="0">
                 <a:solidFill>
@@ -9282,9 +9002,6 @@
               </a:rPr>
               <a:t>Tabs   </a:t>
             </a:r>
-            <a:pPr algn="r" indent="0" marL="0">
-              <a:buNone/>
-            </a:pPr>
             <a:r>
               <a:rPr lang="en-US" sz="825" b="1" dirty="0">
                 <a:solidFill>
@@ -9296,9 +9013,6 @@
               </a:rPr>
               <a:t>5 </a:t>
             </a:r>
-            <a:pPr algn="r" indent="0" marL="0">
-              <a:buNone/>
-            </a:pPr>
             <a:r>
               <a:rPr lang="en-US" sz="825" dirty="0">
                 <a:solidFill>
@@ -9310,9 +9024,6 @@
               </a:rPr>
               <a:t>Stack   </a:t>
             </a:r>
-            <a:pPr algn="r" indent="0" marL="0">
-              <a:buNone/>
-            </a:pPr>
             <a:r>
               <a:rPr lang="en-US" sz="825" b="1" dirty="0">
                 <a:solidFill>
@@ -9324,9 +9035,6 @@
               </a:rPr>
               <a:t>95% </a:t>
             </a:r>
-            <a:pPr algn="r" indent="0" marL="0">
-              <a:buNone/>
-            </a:pPr>
             <a:r>
               <a:rPr lang="en-US" sz="825" dirty="0">
                 <a:solidFill>
@@ -9643,4 +9351,319 @@
     </a:ext>
   </a:extLst>
 </a:theme>
+</file>
+
+<file path=ppt/theme/theme2.xml><?xml version="1.0" encoding="utf-8"?>
+<a:theme xmlns:a="http://schemas.openxmlformats.org/drawingml/2006/main" name="Office 테마">
+  <a:themeElements>
+    <a:clrScheme name="Office">
+      <a:dk1>
+        <a:sysClr val="windowText" lastClr="000000"/>
+      </a:dk1>
+      <a:lt1>
+        <a:sysClr val="window" lastClr="FFFFFF"/>
+      </a:lt1>
+      <a:dk2>
+        <a:srgbClr val="0E2841"/>
+      </a:dk2>
+      <a:lt2>
+        <a:srgbClr val="E8E8E8"/>
+      </a:lt2>
+      <a:accent1>
+        <a:srgbClr val="156082"/>
+      </a:accent1>
+      <a:accent2>
+        <a:srgbClr val="E97132"/>
+      </a:accent2>
+      <a:accent3>
+        <a:srgbClr val="196B24"/>
+      </a:accent3>
+      <a:accent4>
+        <a:srgbClr val="0F9ED5"/>
+      </a:accent4>
+      <a:accent5>
+        <a:srgbClr val="A02B93"/>
+      </a:accent5>
+      <a:accent6>
+        <a:srgbClr val="4EA72E"/>
+      </a:accent6>
+      <a:hlink>
+        <a:srgbClr val="467886"/>
+      </a:hlink>
+      <a:folHlink>
+        <a:srgbClr val="96607D"/>
+      </a:folHlink>
+    </a:clrScheme>
+    <a:fontScheme name="Office">
+      <a:majorFont>
+        <a:latin typeface="맑은 고딕" panose="02110004020202020204"/>
+        <a:ea typeface=""/>
+        <a:cs typeface=""/>
+        <a:font script="Jpan" typeface="游ゴシック Light"/>
+        <a:font script="Hang" typeface="맑은 고딕"/>
+        <a:font script="Hans" typeface="等线 Light"/>
+        <a:font script="Hant" typeface="新細明體"/>
+        <a:font script="Arab" typeface="Times New Roman"/>
+        <a:font script="Hebr" typeface="Times New Roman"/>
+        <a:font script="Thai" typeface="Angsana New"/>
+        <a:font script="Ethi" typeface="Nyala"/>
+        <a:font script="Beng" typeface="Vrinda"/>
+        <a:font script="Gujr" typeface="Shruti"/>
+        <a:font script="Khmr" typeface="MoolBoran"/>
+        <a:font script="Knda" typeface="Tunga"/>
+        <a:font script="Guru" typeface="Raavi"/>
+        <a:font script="Cans" typeface="Euphemia"/>
+        <a:font script="Cher" typeface="Plantagenet Cherokee"/>
+        <a:font script="Yiii" typeface="Microsoft Yi Baiti"/>
+        <a:font script="Tibt" typeface="Microsoft Himalaya"/>
+        <a:font script="Thaa" typeface="MV Boli"/>
+        <a:font script="Deva" typeface="Mangal"/>
+        <a:font script="Telu" typeface="Gautami"/>
+        <a:font script="Taml" typeface="Latha"/>
+        <a:font script="Syrc" typeface="Estrangelo Edessa"/>
+        <a:font script="Orya" typeface="Kalinga"/>
+        <a:font script="Mlym" typeface="Kartika"/>
+        <a:font script="Laoo" typeface="DokChampa"/>
+        <a:font script="Sinh" typeface="Iskoola Pota"/>
+        <a:font script="Mong" typeface="Mongolian Baiti"/>
+        <a:font script="Viet" typeface="Times New Roman"/>
+        <a:font script="Uigh" typeface="Microsoft Uighur"/>
+        <a:font script="Geor" typeface="Sylfaen"/>
+        <a:font script="Armn" typeface="Arial"/>
+        <a:font script="Bugi" typeface="Leelawadee UI"/>
+        <a:font script="Bopo" typeface="Microsoft JhengHei"/>
+        <a:font script="Java" typeface="Javanese Text"/>
+        <a:font script="Lisu" typeface="Segoe UI"/>
+        <a:font script="Mymr" typeface="Myanmar Text"/>
+        <a:font script="Nkoo" typeface="Ebrima"/>
+        <a:font script="Olck" typeface="Nirmala UI"/>
+        <a:font script="Osma" typeface="Ebrima"/>
+        <a:font script="Phag" typeface="Phagspa"/>
+        <a:font script="Syrn" typeface="Estrangelo Edessa"/>
+        <a:font script="Syrj" typeface="Estrangelo Edessa"/>
+        <a:font script="Syre" typeface="Estrangelo Edessa"/>
+        <a:font script="Sora" typeface="Nirmala UI"/>
+        <a:font script="Tale" typeface="Microsoft Tai Le"/>
+        <a:font script="Talu" typeface="Microsoft New Tai Lue"/>
+        <a:font script="Tfng" typeface="Ebrima"/>
+      </a:majorFont>
+      <a:minorFont>
+        <a:latin typeface="맑은 고딕" panose="02110004020202020204"/>
+        <a:ea typeface=""/>
+        <a:cs typeface=""/>
+        <a:font script="Jpan" typeface="游ゴシック"/>
+        <a:font script="Hang" typeface="맑은 고딕"/>
+        <a:font script="Hans" typeface="等线"/>
+        <a:font script="Hant" typeface="新細明體"/>
+        <a:font script="Arab" typeface="Arial"/>
+        <a:font script="Hebr" typeface="Arial"/>
+        <a:font script="Thai" typeface="Cordia New"/>
+        <a:font script="Ethi" typeface="Nyala"/>
+        <a:font script="Beng" typeface="Vrinda"/>
+        <a:font script="Gujr" typeface="Shruti"/>
+        <a:font script="Khmr" typeface="DaunPenh"/>
+        <a:font script="Knda" typeface="Tunga"/>
+        <a:font script="Guru" typeface="Raavi"/>
+        <a:font script="Cans" typeface="Euphemia"/>
+        <a:font script="Cher" typeface="Plantagenet Cherokee"/>
+        <a:font script="Yiii" typeface="Microsoft Yi Baiti"/>
+        <a:font script="Tibt" typeface="Microsoft Himalaya"/>
+        <a:font script="Thaa" typeface="MV Boli"/>
+        <a:font script="Deva" typeface="Mangal"/>
+        <a:font script="Telu" typeface="Gautami"/>
+        <a:font script="Taml" typeface="Latha"/>
+        <a:font script="Syrc" typeface="Estrangelo Edessa"/>
+        <a:font script="Orya" typeface="Kalinga"/>
+        <a:font script="Mlym" typeface="Kartika"/>
+        <a:font script="Laoo" typeface="DokChampa"/>
+        <a:font script="Sinh" typeface="Iskoola Pota"/>
+        <a:font script="Mong" typeface="Mongolian Baiti"/>
+        <a:font script="Viet" typeface="Arial"/>
+        <a:font script="Uigh" typeface="Microsoft Uighur"/>
+        <a:font script="Geor" typeface="Sylfaen"/>
+        <a:font script="Armn" typeface="Arial"/>
+        <a:font script="Bugi" typeface="Leelawadee UI"/>
+        <a:font script="Bopo" typeface="Microsoft JhengHei"/>
+        <a:font script="Java" typeface="Javanese Text"/>
+        <a:font script="Lisu" typeface="Segoe UI"/>
+        <a:font script="Mymr" typeface="Myanmar Text"/>
+        <a:font script="Nkoo" typeface="Ebrima"/>
+        <a:font script="Olck" typeface="Nirmala UI"/>
+        <a:font script="Osma" typeface="Ebrima"/>
+        <a:font script="Phag" typeface="Phagspa"/>
+        <a:font script="Syrn" typeface="Estrangelo Edessa"/>
+        <a:font script="Syrj" typeface="Estrangelo Edessa"/>
+        <a:font script="Syre" typeface="Estrangelo Edessa"/>
+        <a:font script="Sora" typeface="Nirmala UI"/>
+        <a:font script="Tale" typeface="Microsoft Tai Le"/>
+        <a:font script="Talu" typeface="Microsoft New Tai Lue"/>
+        <a:font script="Tfng" typeface="Ebrima"/>
+      </a:minorFont>
+    </a:fontScheme>
+    <a:fmtScheme name="Office">
+      <a:fillStyleLst>
+        <a:solidFill>
+          <a:schemeClr val="phClr"/>
+        </a:solidFill>
+        <a:gradFill rotWithShape="1">
+          <a:gsLst>
+            <a:gs pos="0">
+              <a:schemeClr val="phClr">
+                <a:lumMod val="110000"/>
+                <a:satMod val="105000"/>
+                <a:tint val="67000"/>
+              </a:schemeClr>
+            </a:gs>
+            <a:gs pos="50000">
+              <a:schemeClr val="phClr">
+                <a:lumMod val="105000"/>
+                <a:satMod val="103000"/>
+                <a:tint val="73000"/>
+              </a:schemeClr>
+            </a:gs>
+            <a:gs pos="100000">
+              <a:schemeClr val="phClr">
+                <a:lumMod val="105000"/>
+                <a:satMod val="109000"/>
+                <a:tint val="81000"/>
+              </a:schemeClr>
+            </a:gs>
+          </a:gsLst>
+          <a:lin ang="5400000" scaled="0"/>
+        </a:gradFill>
+        <a:gradFill rotWithShape="1">
+          <a:gsLst>
+            <a:gs pos="0">
+              <a:schemeClr val="phClr">
+                <a:satMod val="103000"/>
+                <a:lumMod val="102000"/>
+                <a:tint val="94000"/>
+              </a:schemeClr>
+            </a:gs>
+            <a:gs pos="50000">
+              <a:schemeClr val="phClr">
+                <a:satMod val="110000"/>
+                <a:lumMod val="100000"/>
+                <a:shade val="100000"/>
+              </a:schemeClr>
+            </a:gs>
+            <a:gs pos="100000">
+              <a:schemeClr val="phClr">
+                <a:lumMod val="99000"/>
+                <a:satMod val="120000"/>
+                <a:shade val="78000"/>
+              </a:schemeClr>
+            </a:gs>
+          </a:gsLst>
+          <a:lin ang="5400000" scaled="0"/>
+        </a:gradFill>
+      </a:fillStyleLst>
+      <a:lnStyleLst>
+        <a:ln w="12700" cap="flat" cmpd="sng" algn="ctr">
+          <a:solidFill>
+            <a:schemeClr val="phClr"/>
+          </a:solidFill>
+          <a:prstDash val="solid"/>
+          <a:miter lim="800000"/>
+        </a:ln>
+        <a:ln w="19050" cap="flat" cmpd="sng" algn="ctr">
+          <a:solidFill>
+            <a:schemeClr val="phClr"/>
+          </a:solidFill>
+          <a:prstDash val="solid"/>
+          <a:miter lim="800000"/>
+        </a:ln>
+        <a:ln w="25400" cap="flat" cmpd="sng" algn="ctr">
+          <a:solidFill>
+            <a:schemeClr val="phClr"/>
+          </a:solidFill>
+          <a:prstDash val="solid"/>
+          <a:miter lim="800000"/>
+        </a:ln>
+      </a:lnStyleLst>
+      <a:effectStyleLst>
+        <a:effectStyle>
+          <a:effectLst/>
+        </a:effectStyle>
+        <a:effectStyle>
+          <a:effectLst/>
+        </a:effectStyle>
+        <a:effectStyle>
+          <a:effectLst>
+            <a:outerShdw blurRad="57150" dist="19050" dir="5400000" algn="ctr" rotWithShape="0">
+              <a:srgbClr val="000000">
+                <a:alpha val="63000"/>
+              </a:srgbClr>
+            </a:outerShdw>
+          </a:effectLst>
+        </a:effectStyle>
+      </a:effectStyleLst>
+      <a:bgFillStyleLst>
+        <a:solidFill>
+          <a:schemeClr val="phClr"/>
+        </a:solidFill>
+        <a:solidFill>
+          <a:schemeClr val="phClr">
+            <a:tint val="95000"/>
+            <a:satMod val="170000"/>
+          </a:schemeClr>
+        </a:solidFill>
+        <a:gradFill rotWithShape="1">
+          <a:gsLst>
+            <a:gs pos="0">
+              <a:schemeClr val="phClr">
+                <a:tint val="93000"/>
+                <a:satMod val="150000"/>
+                <a:shade val="98000"/>
+                <a:lumMod val="102000"/>
+              </a:schemeClr>
+            </a:gs>
+            <a:gs pos="50000">
+              <a:schemeClr val="phClr">
+                <a:tint val="98000"/>
+                <a:satMod val="130000"/>
+                <a:shade val="90000"/>
+                <a:lumMod val="103000"/>
+              </a:schemeClr>
+            </a:gs>
+            <a:gs pos="100000">
+              <a:schemeClr val="phClr">
+                <a:shade val="63000"/>
+                <a:satMod val="120000"/>
+              </a:schemeClr>
+            </a:gs>
+          </a:gsLst>
+          <a:lin ang="5400000" scaled="0"/>
+        </a:gradFill>
+      </a:bgFillStyleLst>
+    </a:fmtScheme>
+  </a:themeElements>
+  <a:objectDefaults>
+    <a:lnDef>
+      <a:spPr/>
+      <a:bodyPr/>
+      <a:lstStyle/>
+      <a:style>
+        <a:lnRef idx="2">
+          <a:schemeClr val="accent1"/>
+        </a:lnRef>
+        <a:fillRef idx="0">
+          <a:schemeClr val="accent1"/>
+        </a:fillRef>
+        <a:effectRef idx="1">
+          <a:schemeClr val="accent1"/>
+        </a:effectRef>
+        <a:fontRef idx="minor">
+          <a:schemeClr val="tx1"/>
+        </a:fontRef>
+      </a:style>
+    </a:lnDef>
+  </a:objectDefaults>
+  <a:extraClrSchemeLst/>
+  <a:extLst>
+    <a:ext uri="{05A4C25C-085E-4340-85A3-A5531E510DB2}">
+      <thm15:themeFamily xmlns:thm15="http://schemas.microsoft.com/office/thememl/2012/main" name="Office Theme" id="{2E142A2C-CD16-42D6-873A-C26D2A0506FA}" vid="{1BDDFF52-6CD6-40A5-AB3C-68EB2F1E4D0A}"/>
+    </a:ext>
+  </a:extLst>
+</a:theme>
 </file>